--- a/static/ppts/G7_Sci_Friction_Air_Resistance.pptx
+++ b/static/ppts/G7_Sci_Friction_Air_Resistance.pptx
@@ -11,9 +11,11 @@
     <p:sldId id="259" r:id="rId5"/>
     <p:sldId id="260" r:id="rId6"/>
     <p:sldId id="261" r:id="rId7"/>
+    <p:sldId id="262" r:id="rId8"/>
+    <p:sldId id="263" r:id="rId9"/>
   </p:sldIdLst>
   <p:notesMasterIdLst>
-    <p:notesMasterId r:id="rId8"/>
+    <p:notesMasterId r:id="rId10"/>
   </p:notesMasterIdLst>
   <p:sldSz cx="9144000" cy="5143500"/>
   <p:notesSz cx="5143500" cy="9144000"/>
@@ -989,6 +991,182 @@
 </p:notes>
 </file>
 
+<file path=ppt/notesSlides/notesSlide7.xml><?xml version="1.0" encoding="utf-8"?>
+<p:notes xmlns:a="http://schemas.openxmlformats.org/drawingml/2006/main" xmlns:r="http://schemas.openxmlformats.org/officeDocument/2006/relationships" xmlns:p="http://schemas.openxmlformats.org/presentationml/2006/main">
+  <p:cSld>
+    <p:spTree>
+      <p:nvGrpSpPr>
+        <p:cNvPr id="1" name=""/>
+        <p:cNvGrpSpPr/>
+        <p:nvPr/>
+      </p:nvGrpSpPr>
+      <p:grpSpPr>
+        <a:xfrm>
+          <a:off x="0" y="0"/>
+          <a:ext cx="0" cy="0"/>
+          <a:chOff x="0" y="0"/>
+          <a:chExt cx="0" cy="0"/>
+        </a:xfrm>
+      </p:grpSpPr>
+      <p:sp>
+        <p:nvSpPr>
+          <p:cNvPr id="2" name="Slide Image Placeholder 1"/>
+          <p:cNvSpPr>
+            <a:spLocks noGrp="1" noRot="1" noChangeAspect="1"/>
+          </p:cNvSpPr>
+          <p:nvPr>
+            <p:ph type="sldImg"/>
+          </p:nvPr>
+        </p:nvSpPr>
+        <p:spPr/>
+      </p:sp>
+      <p:sp>
+        <p:nvSpPr>
+          <p:cNvPr id="3" name="Notes Placeholder 2"/>
+          <p:cNvSpPr>
+            <a:spLocks noGrp="1"/>
+          </p:cNvSpPr>
+          <p:nvPr>
+            <p:ph type="body" idx="1"/>
+          </p:nvPr>
+        </p:nvSpPr>
+        <p:spPr/>
+        <p:txBody>
+          <a:bodyPr/>
+          <a:lstStyle/>
+          <a:p>
+            <a:r>
+              <a:rPr lang="en-US" dirty="0"/>
+              <a:t/>
+            </a:r>
+            <a:endParaRPr lang="en-US" dirty="0"/>
+          </a:p>
+        </p:txBody>
+      </p:sp>
+      <p:sp>
+        <p:nvSpPr>
+          <p:cNvPr id="4" name="Slide Number Placeholder 3"/>
+          <p:cNvSpPr>
+            <a:spLocks noGrp="1"/>
+          </p:cNvSpPr>
+          <p:nvPr>
+            <p:ph type="sldNum" sz="quarter" idx="10"/>
+          </p:nvPr>
+        </p:nvSpPr>
+        <p:spPr/>
+        <p:txBody>
+          <a:bodyPr/>
+          <a:lstStyle/>
+          <a:p>
+            <a:fld id="{F7021451-1387-4CA6-816F-3879F97B5CBC}" type="slidenum">
+              <a:rPr lang="en-US"/>
+              <a:t>7</a:t>
+            </a:fld>
+            <a:endParaRPr lang="en-US"/>
+          </a:p>
+        </p:txBody>
+      </p:sp>
+    </p:spTree>
+    <p:extLst>
+      <p:ext uri="{BB962C8B-B14F-4D97-AF65-F5344CB8AC3E}">
+        <p14:creationId xmlns:p14="http://schemas.microsoft.com/office/powerpoint/2010/main" val="1024086991"/>
+      </p:ext>
+    </p:extLst>
+  </p:cSld>
+  <p:clrMapOvr>
+    <a:masterClrMapping/>
+  </p:clrMapOvr>
+</p:notes>
+</file>
+
+<file path=ppt/notesSlides/notesSlide8.xml><?xml version="1.0" encoding="utf-8"?>
+<p:notes xmlns:a="http://schemas.openxmlformats.org/drawingml/2006/main" xmlns:r="http://schemas.openxmlformats.org/officeDocument/2006/relationships" xmlns:p="http://schemas.openxmlformats.org/presentationml/2006/main">
+  <p:cSld>
+    <p:spTree>
+      <p:nvGrpSpPr>
+        <p:cNvPr id="1" name=""/>
+        <p:cNvGrpSpPr/>
+        <p:nvPr/>
+      </p:nvGrpSpPr>
+      <p:grpSpPr>
+        <a:xfrm>
+          <a:off x="0" y="0"/>
+          <a:ext cx="0" cy="0"/>
+          <a:chOff x="0" y="0"/>
+          <a:chExt cx="0" cy="0"/>
+        </a:xfrm>
+      </p:grpSpPr>
+      <p:sp>
+        <p:nvSpPr>
+          <p:cNvPr id="2" name="Slide Image Placeholder 1"/>
+          <p:cNvSpPr>
+            <a:spLocks noGrp="1" noRot="1" noChangeAspect="1"/>
+          </p:cNvSpPr>
+          <p:nvPr>
+            <p:ph type="sldImg"/>
+          </p:nvPr>
+        </p:nvSpPr>
+        <p:spPr/>
+      </p:sp>
+      <p:sp>
+        <p:nvSpPr>
+          <p:cNvPr id="3" name="Notes Placeholder 2"/>
+          <p:cNvSpPr>
+            <a:spLocks noGrp="1"/>
+          </p:cNvSpPr>
+          <p:nvPr>
+            <p:ph type="body" idx="1"/>
+          </p:nvPr>
+        </p:nvSpPr>
+        <p:spPr/>
+        <p:txBody>
+          <a:bodyPr/>
+          <a:lstStyle/>
+          <a:p>
+            <a:r>
+              <a:rPr lang="en-US" dirty="0"/>
+              <a:t/>
+            </a:r>
+            <a:endParaRPr lang="en-US" dirty="0"/>
+          </a:p>
+        </p:txBody>
+      </p:sp>
+      <p:sp>
+        <p:nvSpPr>
+          <p:cNvPr id="4" name="Slide Number Placeholder 3"/>
+          <p:cNvSpPr>
+            <a:spLocks noGrp="1"/>
+          </p:cNvSpPr>
+          <p:nvPr>
+            <p:ph type="sldNum" sz="quarter" idx="10"/>
+          </p:nvPr>
+        </p:nvSpPr>
+        <p:spPr/>
+        <p:txBody>
+          <a:bodyPr/>
+          <a:lstStyle/>
+          <a:p>
+            <a:fld id="{F7021451-1387-4CA6-816F-3879F97B5CBC}" type="slidenum">
+              <a:rPr lang="en-US"/>
+              <a:t>8</a:t>
+            </a:fld>
+            <a:endParaRPr lang="en-US"/>
+          </a:p>
+        </p:txBody>
+      </p:sp>
+    </p:spTree>
+    <p:extLst>
+      <p:ext uri="{BB962C8B-B14F-4D97-AF65-F5344CB8AC3E}">
+        <p14:creationId xmlns:p14="http://schemas.microsoft.com/office/powerpoint/2010/main" val="1024086991"/>
+      </p:ext>
+    </p:extLst>
+  </p:cSld>
+  <p:clrMapOvr>
+    <a:masterClrMapping/>
+  </p:clrMapOvr>
+</p:notes>
+</file>
+
 <file path=ppt/slideLayouts/slideLayout1.xml><?xml version="1.0" encoding="utf-8"?>
 <p:sldLayout xmlns:a="http://schemas.openxmlformats.org/drawingml/2006/main" xmlns:r="http://schemas.openxmlformats.org/officeDocument/2006/relationships" xmlns:p="http://schemas.openxmlformats.org/presentationml/2006/main" preserve="1">
   <p:cSld name="DEFAULT">
@@ -1425,7 +1603,24 @@
                 <a:ea typeface="Georgia" pitchFamily="34" charset="-122"/>
                 <a:cs typeface="Georgia" pitchFamily="34" charset="-120"/>
               </a:rPr>
-              <a:t>Friction &amp; Air Resistance</a:t>
+              <a:t>Friction &amp;</a:t>
+            </a:r>
+            <a:endParaRPr lang="en-US" sz="4000" dirty="0"/>
+          </a:p>
+          <a:p>
+            <a:pPr indent="0" marL="0">
+              <a:buNone/>
+            </a:pPr>
+            <a:r>
+              <a:rPr lang="en-US" sz="4000" b="1" dirty="0">
+                <a:solidFill>
+                  <a:srgbClr val="FFFFFF"/>
+                </a:solidFill>
+                <a:latin typeface="Georgia" pitchFamily="34" charset="0"/>
+                <a:ea typeface="Georgia" pitchFamily="34" charset="-122"/>
+                <a:cs typeface="Georgia" pitchFamily="34" charset="-120"/>
+              </a:rPr>
+              <a:t>Air Resistance</a:t>
             </a:r>
             <a:endParaRPr lang="en-US" sz="4000" dirty="0"/>
           </a:p>
@@ -1456,7 +1651,7 @@
               <a:buNone/>
             </a:pPr>
             <a:r>
-              <a:rPr lang="en-US" sz="1600" dirty="0">
+              <a:rPr lang="en-US" sz="1600" i="1" dirty="0">
                 <a:solidFill>
                   <a:srgbClr val="9B9690"/>
                 </a:solidFill>
@@ -1464,7 +1659,7 @@
                 <a:ea typeface="Calibri" pitchFamily="34" charset="-122"/>
                 <a:cs typeface="Calibri" pitchFamily="34" charset="-120"/>
               </a:rPr>
-              <a:t>Forces that oppose motion</a:t>
+              <a:t>Forces that slow things down</a:t>
             </a:r>
             <a:endParaRPr lang="en-US" sz="1600" dirty="0"/>
           </a:p>
@@ -1495,7 +1690,7 @@
               <a:buNone/>
             </a:pPr>
             <a:r>
-              <a:rPr lang="en-US" sz="1100" dirty="0">
+              <a:rPr lang="en-US" sz="1200" dirty="0">
                 <a:solidFill>
                   <a:srgbClr val="6B6660"/>
                 </a:solidFill>
@@ -1503,9 +1698,9 @@
                 <a:ea typeface="Calibri" pitchFamily="34" charset="-122"/>
                 <a:cs typeface="Calibri" pitchFamily="34" charset="-120"/>
               </a:rPr>
-              <a:t>Mr Zocchi · NIS</a:t>
-            </a:r>
-            <a:endParaRPr lang="en-US" sz="1100" dirty="0"/>
+              <a:t>Mr Zocchi</a:t>
+            </a:r>
+            <a:endParaRPr lang="en-US" sz="1200" dirty="0"/>
           </a:p>
         </p:txBody>
       </p:sp>
@@ -1549,41 +1744,21 @@
             <a:avLst/>
           </a:prstGeom>
           <a:solidFill>
-            <a:srgbClr val="FAF8F5"/>
-          </a:solidFill>
-          <a:ln/>
-        </p:spPr>
-      </p:sp>
-      <p:sp>
-        <p:nvSpPr>
-          <p:cNvPr id="3" name="Shape 1"/>
-          <p:cNvSpPr/>
-          <p:nvPr/>
-        </p:nvSpPr>
-        <p:spPr>
-          <a:xfrm>
-            <a:off x="0" y="0"/>
-            <a:ext cx="9144000" cy="54864"/>
-          </a:xfrm>
-          <a:prstGeom prst="rect">
-            <a:avLst/>
-          </a:prstGeom>
-          <a:solidFill>
-            <a:srgbClr val="C8372D"/>
-          </a:solidFill>
-          <a:ln/>
-        </p:spPr>
-      </p:sp>
-      <p:sp>
-        <p:nvSpPr>
-          <p:cNvPr id="4" name="Text 2"/>
-          <p:cNvSpPr/>
-          <p:nvPr/>
-        </p:nvSpPr>
-        <p:spPr>
-          <a:xfrm>
-            <a:off x="640080" y="320040"/>
-            <a:ext cx="7863840" cy="640080"/>
+            <a:srgbClr val="111D35"/>
+          </a:solidFill>
+          <a:ln/>
+        </p:spPr>
+      </p:sp>
+      <p:sp>
+        <p:nvSpPr>
+          <p:cNvPr id="3" name="Text 1"/>
+          <p:cNvSpPr/>
+          <p:nvPr/>
+        </p:nvSpPr>
+        <p:spPr>
+          <a:xfrm>
+            <a:off x="6858000" y="182880"/>
+            <a:ext cx="2286000" cy="2743200"/>
           </a:xfrm>
           <a:prstGeom prst="rect">
             <a:avLst/>
@@ -1592,37 +1767,39 @@
           <a:ln/>
         </p:spPr>
         <p:txBody>
-          <a:bodyPr wrap="square" lIns="0" tIns="0" rIns="0" bIns="0" rtlCol="0" anchor="ctr"/>
-          <a:lstStyle/>
-          <a:p>
-            <a:pPr indent="0" marL="0">
+          <a:bodyPr wrap="square" rtlCol="0" anchor="ctr"/>
+          <a:lstStyle/>
+          <a:p>
+            <a:pPr algn="ctr" indent="0" marL="0">
               <a:buNone/>
             </a:pPr>
             <a:r>
-              <a:rPr lang="en-US" sz="2600" b="1" dirty="0">
-                <a:solidFill>
-                  <a:srgbClr val="1B2A4A"/>
+              <a:rPr lang="en-US" sz="16000" b="1" dirty="0">
+                <a:solidFill>
+                  <a:srgbClr val="C8372D">
+                    <a:alpha val="80000"/>
+                  </a:srgbClr>
                 </a:solidFill>
                 <a:latin typeface="Georgia" pitchFamily="34" charset="0"/>
                 <a:ea typeface="Georgia" pitchFamily="34" charset="-122"/>
                 <a:cs typeface="Georgia" pitchFamily="34" charset="-120"/>
               </a:rPr>
-              <a:t>What Is Friction?</a:t>
-            </a:r>
-            <a:endParaRPr lang="en-US" sz="2600" dirty="0"/>
-          </a:p>
-        </p:txBody>
-      </p:sp>
-      <p:sp>
-        <p:nvSpPr>
-          <p:cNvPr id="5" name="Text 3"/>
-          <p:cNvSpPr/>
-          <p:nvPr/>
-        </p:nvSpPr>
-        <p:spPr>
-          <a:xfrm>
-            <a:off x="640080" y="1188720"/>
-            <a:ext cx="7863840" cy="3200400"/>
+              <a:t>?</a:t>
+            </a:r>
+            <a:endParaRPr lang="en-US" sz="16000" dirty="0"/>
+          </a:p>
+        </p:txBody>
+      </p:sp>
+      <p:sp>
+        <p:nvSpPr>
+          <p:cNvPr id="4" name="Text 2"/>
+          <p:cNvSpPr/>
+          <p:nvPr/>
+        </p:nvSpPr>
+        <p:spPr>
+          <a:xfrm>
+            <a:off x="731520" y="548640"/>
+            <a:ext cx="2743200" cy="365760"/>
           </a:xfrm>
           <a:prstGeom prst="rect">
             <a:avLst/>
@@ -1631,91 +1808,246 @@
           <a:ln/>
         </p:spPr>
         <p:txBody>
-          <a:bodyPr wrap="square" rtlCol="0" anchor="t"/>
-          <a:lstStyle/>
-          <a:p>
-            <a:pPr marL="342900" indent="-342900">
-              <a:lnSpc>
-                <a:spcPct val="140000"/>
-              </a:lnSpc>
-              <a:buSzPct val="100000"/>
-              <a:buChar char="•"/>
-            </a:pPr>
-            <a:r>
-              <a:rPr lang="en-US" sz="1500" dirty="0">
-                <a:solidFill>
-                  <a:srgbClr val="3D3A36"/>
+          <a:bodyPr wrap="square" rtlCol="0" anchor="ctr"/>
+          <a:lstStyle/>
+          <a:p>
+            <a:pPr indent="0" marL="0">
+              <a:buNone/>
+            </a:pPr>
+            <a:r>
+              <a:rPr lang="en-US" sz="1200" b="1" spc="400" kern="0" dirty="0">
+                <a:solidFill>
+                  <a:srgbClr val="C8372D"/>
                 </a:solidFill>
                 <a:latin typeface="Calibri" pitchFamily="34" charset="0"/>
                 <a:ea typeface="Calibri" pitchFamily="34" charset="-122"/>
                 <a:cs typeface="Calibri" pitchFamily="34" charset="-120"/>
               </a:rPr>
-              <a:t>Friction opposes motion when two surfaces rub together.</a:t>
-            </a:r>
-            <a:endParaRPr lang="en-US" sz="1500" dirty="0"/>
-          </a:p>
-          <a:p>
-            <a:pPr marL="342900" indent="-342900">
-              <a:lnSpc>
-                <a:spcPct val="140000"/>
-              </a:lnSpc>
-              <a:buSzPct val="100000"/>
-              <a:buChar char="•"/>
-            </a:pPr>
-            <a:r>
-              <a:rPr lang="en-US" sz="1500" dirty="0">
-                <a:solidFill>
-                  <a:srgbClr val="3D3A36"/>
+              <a:t>INQUIRY</a:t>
+            </a:r>
+            <a:endParaRPr lang="en-US" sz="1200" dirty="0"/>
+          </a:p>
+        </p:txBody>
+      </p:sp>
+      <p:sp>
+        <p:nvSpPr>
+          <p:cNvPr id="5" name="Text 3"/>
+          <p:cNvSpPr/>
+          <p:nvPr/>
+        </p:nvSpPr>
+        <p:spPr>
+          <a:xfrm>
+            <a:off x="731520" y="1005840"/>
+            <a:ext cx="6858000" cy="1463040"/>
+          </a:xfrm>
+          <a:prstGeom prst="rect">
+            <a:avLst/>
+          </a:prstGeom>
+          <a:noFill/>
+          <a:ln/>
+        </p:spPr>
+        <p:txBody>
+          <a:bodyPr wrap="square" rtlCol="0" anchor="t"/>
+          <a:lstStyle/>
+          <a:p>
+            <a:pPr indent="0" marL="0">
+              <a:buNone/>
+            </a:pPr>
+            <a:r>
+              <a:rPr lang="en-US" sz="2800" b="1" dirty="0">
+                <a:solidFill>
+                  <a:srgbClr val="FFFFFF"/>
+                </a:solidFill>
+                <a:latin typeface="Georgia" pitchFamily="34" charset="0"/>
+                <a:ea typeface="Georgia" pitchFamily="34" charset="-122"/>
+                <a:cs typeface="Georgia" pitchFamily="34" charset="-120"/>
+              </a:rPr>
+              <a:t>Why do speed skaters at the Winter Olympics (Beijing 2022, PyeongChang 2018) wear skin-tight suits?</a:t>
+            </a:r>
+            <a:endParaRPr lang="en-US" sz="2800" dirty="0"/>
+          </a:p>
+        </p:txBody>
+      </p:sp>
+      <p:sp>
+        <p:nvSpPr>
+          <p:cNvPr id="6" name="Text 4"/>
+          <p:cNvSpPr/>
+          <p:nvPr/>
+        </p:nvSpPr>
+        <p:spPr>
+          <a:xfrm>
+            <a:off x="731520" y="2560320"/>
+            <a:ext cx="6858000" cy="548640"/>
+          </a:xfrm>
+          <a:prstGeom prst="rect">
+            <a:avLst/>
+          </a:prstGeom>
+          <a:noFill/>
+          <a:ln/>
+        </p:spPr>
+        <p:txBody>
+          <a:bodyPr wrap="square" rtlCol="0" anchor="ctr"/>
+          <a:lstStyle/>
+          <a:p>
+            <a:pPr indent="0" marL="0">
+              <a:buNone/>
+            </a:pPr>
+            <a:r>
+              <a:rPr lang="en-US" sz="1400" i="1" dirty="0">
+                <a:solidFill>
+                  <a:srgbClr val="9B9690"/>
                 </a:solidFill>
                 <a:latin typeface="Calibri" pitchFamily="34" charset="0"/>
                 <a:ea typeface="Calibri" pitchFamily="34" charset="-122"/>
                 <a:cs typeface="Calibri" pitchFamily="34" charset="-120"/>
               </a:rPr>
-              <a:t>Always acts in the opposite direction to movement.</a:t>
-            </a:r>
-            <a:endParaRPr lang="en-US" sz="1500" dirty="0"/>
-          </a:p>
-          <a:p>
-            <a:pPr marL="342900" indent="-342900">
-              <a:lnSpc>
-                <a:spcPct val="140000"/>
-              </a:lnSpc>
-              <a:buSzPct val="100000"/>
-              <a:buChar char="•"/>
-            </a:pPr>
-            <a:r>
-              <a:rPr lang="en-US" sz="1500" dirty="0">
-                <a:solidFill>
-                  <a:srgbClr val="3D3A36"/>
+              <a:t>Reducing air resistance by even a tiny amount can mean winning or losing.</a:t>
+            </a:r>
+            <a:endParaRPr lang="en-US" sz="1400" dirty="0"/>
+          </a:p>
+        </p:txBody>
+      </p:sp>
+      <p:sp>
+        <p:nvSpPr>
+          <p:cNvPr id="7" name="Shape 5"/>
+          <p:cNvSpPr/>
+          <p:nvPr/>
+        </p:nvSpPr>
+        <p:spPr>
+          <a:xfrm>
+            <a:off x="548640" y="3200400"/>
+            <a:ext cx="7315200" cy="1645920"/>
+          </a:xfrm>
+          <a:prstGeom prst="rect">
+            <a:avLst/>
+          </a:prstGeom>
+          <a:solidFill>
+            <a:srgbClr val="243660"/>
+          </a:solidFill>
+          <a:ln/>
+        </p:spPr>
+      </p:sp>
+      <p:sp>
+        <p:nvSpPr>
+          <p:cNvPr id="8" name="Text 6"/>
+          <p:cNvSpPr/>
+          <p:nvPr/>
+        </p:nvSpPr>
+        <p:spPr>
+          <a:xfrm>
+            <a:off x="731520" y="3246120"/>
+            <a:ext cx="3657600" cy="320040"/>
+          </a:xfrm>
+          <a:prstGeom prst="rect">
+            <a:avLst/>
+          </a:prstGeom>
+          <a:noFill/>
+          <a:ln/>
+        </p:spPr>
+        <p:txBody>
+          <a:bodyPr wrap="square" rtlCol="0" anchor="ctr"/>
+          <a:lstStyle/>
+          <a:p>
+            <a:pPr indent="0" marL="0">
+              <a:buNone/>
+            </a:pPr>
+            <a:r>
+              <a:rPr lang="en-US" sz="1100" b="1" spc="200" kern="0" dirty="0">
+                <a:solidFill>
+                  <a:srgbClr val="C8372D"/>
                 </a:solidFill>
                 <a:latin typeface="Calibri" pitchFamily="34" charset="0"/>
                 <a:ea typeface="Calibri" pitchFamily="34" charset="-122"/>
                 <a:cs typeface="Calibri" pitchFamily="34" charset="-120"/>
               </a:rPr>
-              <a:t>Rough surfaces = more friction. Smooth surfaces = less.</a:t>
-            </a:r>
-            <a:endParaRPr lang="en-US" sz="1500" dirty="0"/>
-          </a:p>
+              <a:t>Think — Pair — Share</a:t>
+            </a:r>
+            <a:endParaRPr lang="en-US" sz="1100" dirty="0"/>
+          </a:p>
+        </p:txBody>
+      </p:sp>
+      <p:sp>
+        <p:nvSpPr>
+          <p:cNvPr id="9" name="Text 7"/>
+          <p:cNvSpPr/>
+          <p:nvPr/>
+        </p:nvSpPr>
+        <p:spPr>
+          <a:xfrm>
+            <a:off x="731520" y="3566160"/>
+            <a:ext cx="6949440" cy="1188720"/>
+          </a:xfrm>
+          <a:prstGeom prst="rect">
+            <a:avLst/>
+          </a:prstGeom>
+          <a:noFill/>
+          <a:ln/>
+        </p:spPr>
+        <p:txBody>
+          <a:bodyPr wrap="square" rtlCol="0" anchor="ctr"/>
+          <a:lstStyle/>
           <a:p>
             <a:pPr marL="342900" indent="-342900">
-              <a:lnSpc>
-                <a:spcPct val="140000"/>
-              </a:lnSpc>
+              <a:spcAft>
+                <a:spcPts val="600"/>
+              </a:spcAft>
               <a:buSzPct val="100000"/>
               <a:buChar char="•"/>
             </a:pPr>
             <a:r>
-              <a:rPr lang="en-US" sz="1500" dirty="0">
-                <a:solidFill>
-                  <a:srgbClr val="3D3A36"/>
+              <a:rPr lang="en-US" sz="1400" dirty="0">
+                <a:solidFill>
+                  <a:srgbClr val="E5E2DC"/>
                 </a:solidFill>
                 <a:latin typeface="Calibri" pitchFamily="34" charset="0"/>
                 <a:ea typeface="Calibri" pitchFamily="34" charset="-122"/>
                 <a:cs typeface="Calibri" pitchFamily="34" charset="-120"/>
               </a:rPr>
-              <a:t>Friction converts kinetic energy into heat.</a:t>
-            </a:r>
-            <a:endParaRPr lang="en-US" sz="1500" dirty="0"/>
+              <a:t>What slows a moving object down?</a:t>
+            </a:r>
+            <a:endParaRPr lang="en-US" sz="1400" dirty="0"/>
+          </a:p>
+          <a:p>
+            <a:pPr marL="342900" indent="-342900">
+              <a:spcAft>
+                <a:spcPts val="600"/>
+              </a:spcAft>
+              <a:buSzPct val="100000"/>
+              <a:buChar char="•"/>
+            </a:pPr>
+            <a:r>
+              <a:rPr lang="en-US" sz="1400" dirty="0">
+                <a:solidFill>
+                  <a:srgbClr val="E5E2DC"/>
+                </a:solidFill>
+                <a:latin typeface="Calibri" pitchFamily="34" charset="0"/>
+                <a:ea typeface="Calibri" pitchFamily="34" charset="-122"/>
+                <a:cs typeface="Calibri" pitchFamily="34" charset="-120"/>
+              </a:rPr>
+              <a:t>How does the shape of an object affect how fast it moves?</a:t>
+            </a:r>
+            <a:endParaRPr lang="en-US" sz="1400" dirty="0"/>
+          </a:p>
+          <a:p>
+            <a:pPr marL="342900" indent="-342900">
+              <a:spcAft>
+                <a:spcPts val="600"/>
+              </a:spcAft>
+              <a:buSzPct val="100000"/>
+              <a:buChar char="•"/>
+            </a:pPr>
+            <a:r>
+              <a:rPr lang="en-US" sz="1400" dirty="0">
+                <a:solidFill>
+                  <a:srgbClr val="E5E2DC"/>
+                </a:solidFill>
+                <a:latin typeface="Calibri" pitchFamily="34" charset="0"/>
+                <a:ea typeface="Calibri" pitchFamily="34" charset="-122"/>
+                <a:cs typeface="Calibri" pitchFamily="34" charset="-120"/>
+              </a:rPr>
+              <a:t>Why is ice skating faster than running?</a:t>
+            </a:r>
+            <a:endParaRPr lang="en-US" sz="1400" dirty="0"/>
           </a:p>
         </p:txBody>
       </p:sp>
@@ -1730,6 +2062,13 @@
 <file path=ppt/slides/slide3.xml><?xml version="1.0" encoding="utf-8"?>
 <p:sld xmlns:a="http://schemas.openxmlformats.org/drawingml/2006/main" xmlns:r="http://schemas.openxmlformats.org/officeDocument/2006/relationships" xmlns:p="http://schemas.openxmlformats.org/presentationml/2006/main">
   <p:cSld name="Slide 3">
+    <p:bg>
+      <p:bgPr>
+        <a:solidFill>
+          <a:srgbClr val="FAF8F5"/>
+        </a:solidFill>
+      </p:bgPr>
+    </p:bg>
     <p:spTree>
       <p:nvGrpSpPr>
         <p:cNvPr id="1" name=""/>
@@ -1753,13 +2092,13 @@
         <p:spPr>
           <a:xfrm>
             <a:off x="0" y="0"/>
-            <a:ext cx="9144000" cy="5143500"/>
-          </a:xfrm>
-          <a:prstGeom prst="rect">
-            <a:avLst/>
-          </a:prstGeom>
-          <a:solidFill>
-            <a:srgbClr val="FAF8F5"/>
+            <a:ext cx="9144000" cy="822960"/>
+          </a:xfrm>
+          <a:prstGeom prst="rect">
+            <a:avLst/>
+          </a:prstGeom>
+          <a:solidFill>
+            <a:srgbClr val="FFFFFF"/>
           </a:solidFill>
           <a:ln/>
         </p:spPr>
@@ -1772,8 +2111,8 @@
         </p:nvSpPr>
         <p:spPr>
           <a:xfrm>
-            <a:off x="0" y="0"/>
-            <a:ext cx="9144000" cy="54864"/>
+            <a:off x="0" y="795528"/>
+            <a:ext cx="9144000" cy="27432"/>
           </a:xfrm>
           <a:prstGeom prst="rect">
             <a:avLst/>
@@ -1792,8 +2131,8 @@
         </p:nvSpPr>
         <p:spPr>
           <a:xfrm>
-            <a:off x="640080" y="320040"/>
-            <a:ext cx="7863840" cy="548640"/>
+            <a:off x="640080" y="91440"/>
+            <a:ext cx="7863840" cy="640080"/>
           </a:xfrm>
           <a:prstGeom prst="rect">
             <a:avLst/>
@@ -1809,7 +2148,7 @@
               <a:buNone/>
             </a:pPr>
             <a:r>
-              <a:rPr lang="en-US" sz="2600" b="1" dirty="0">
+              <a:rPr lang="en-US" sz="2200" b="1" dirty="0">
                 <a:solidFill>
                   <a:srgbClr val="1B2A4A"/>
                 </a:solidFill>
@@ -1817,36 +2156,140 @@
                 <a:ea typeface="Georgia" pitchFamily="34" charset="-122"/>
                 <a:cs typeface="Georgia" pitchFamily="34" charset="-120"/>
               </a:rPr>
-              <a:t>Friction: Friend or Foe?</a:t>
-            </a:r>
-            <a:endParaRPr lang="en-US" sz="2600" dirty="0"/>
-          </a:p>
-        </p:txBody>
-      </p:sp>
-      <p:sp>
-        <p:nvSpPr>
-          <p:cNvPr id="5" name="Shape 3"/>
-          <p:cNvSpPr/>
-          <p:nvPr/>
-        </p:nvSpPr>
-        <p:spPr>
-          <a:xfrm>
-            <a:off x="640080" y="1097280"/>
-            <a:ext cx="3749040" cy="3474720"/>
-          </a:xfrm>
-          <a:prstGeom prst="roundRect">
-            <a:avLst>
-              <a:gd name="adj" fmla="val 2632"/>
-            </a:avLst>
-          </a:prstGeom>
-          <a:solidFill>
-            <a:srgbClr val="FFFFFF"/>
+              <a:t>What Is Friction?</a:t>
+            </a:r>
+            <a:endParaRPr lang="en-US" sz="2200" dirty="0"/>
+          </a:p>
+        </p:txBody>
+      </p:sp>
+      <p:sp>
+        <p:nvSpPr>
+          <p:cNvPr id="5" name="Text 3"/>
+          <p:cNvSpPr/>
+          <p:nvPr/>
+        </p:nvSpPr>
+        <p:spPr>
+          <a:xfrm>
+            <a:off x="640080" y="1005840"/>
+            <a:ext cx="7863840" cy="2926080"/>
+          </a:xfrm>
+          <a:prstGeom prst="rect">
+            <a:avLst/>
+          </a:prstGeom>
+          <a:noFill/>
+          <a:ln/>
+        </p:spPr>
+        <p:txBody>
+          <a:bodyPr wrap="square" rtlCol="0" anchor="ctr"/>
+          <a:lstStyle/>
+          <a:p>
+            <a:pPr marL="342900" indent="-342900">
+              <a:spcAft>
+                <a:spcPts val="800"/>
+              </a:spcAft>
+              <a:buSzPct val="100000"/>
+              <a:buChar char="•"/>
+            </a:pPr>
+            <a:r>
+              <a:rPr lang="en-US" sz="1600" dirty="0">
+                <a:solidFill>
+                  <a:srgbClr val="3D3A36"/>
+                </a:solidFill>
+                <a:latin typeface="Calibri" pitchFamily="34" charset="0"/>
+                <a:ea typeface="Calibri" pitchFamily="34" charset="-122"/>
+                <a:cs typeface="Calibri" pitchFamily="34" charset="-120"/>
+              </a:rPr>
+              <a:t>Friction is a contact force between two surfaces.</a:t>
+            </a:r>
+            <a:endParaRPr lang="en-US" sz="1600" dirty="0"/>
+          </a:p>
+          <a:p>
+            <a:pPr marL="342900" indent="-342900">
+              <a:spcAft>
+                <a:spcPts val="800"/>
+              </a:spcAft>
+              <a:buSzPct val="100000"/>
+              <a:buChar char="•"/>
+            </a:pPr>
+            <a:r>
+              <a:rPr lang="en-US" sz="1600" dirty="0">
+                <a:solidFill>
+                  <a:srgbClr val="3D3A36"/>
+                </a:solidFill>
+                <a:latin typeface="Calibri" pitchFamily="34" charset="0"/>
+                <a:ea typeface="Calibri" pitchFamily="34" charset="-122"/>
+                <a:cs typeface="Calibri" pitchFamily="34" charset="-120"/>
+              </a:rPr>
+              <a:t>It always OPPOSES the direction of movement.</a:t>
+            </a:r>
+            <a:endParaRPr lang="en-US" sz="1600" dirty="0"/>
+          </a:p>
+          <a:p>
+            <a:pPr marL="342900" indent="-342900">
+              <a:spcAft>
+                <a:spcPts val="800"/>
+              </a:spcAft>
+              <a:buSzPct val="100000"/>
+              <a:buChar char="•"/>
+            </a:pPr>
+            <a:r>
+              <a:rPr lang="en-US" sz="1600" dirty="0">
+                <a:solidFill>
+                  <a:srgbClr val="3D3A36"/>
+                </a:solidFill>
+                <a:latin typeface="Calibri" pitchFamily="34" charset="0"/>
+                <a:ea typeface="Calibri" pitchFamily="34" charset="-122"/>
+                <a:cs typeface="Calibri" pitchFamily="34" charset="-120"/>
+              </a:rPr>
+              <a:t>Rougher surfaces = more friction.</a:t>
+            </a:r>
+            <a:endParaRPr lang="en-US" sz="1600" dirty="0"/>
+          </a:p>
+          <a:p>
+            <a:pPr marL="342900" indent="-342900">
+              <a:spcAft>
+                <a:spcPts val="800"/>
+              </a:spcAft>
+              <a:buSzPct val="100000"/>
+              <a:buChar char="•"/>
+            </a:pPr>
+            <a:r>
+              <a:rPr lang="en-US" sz="1600" dirty="0">
+                <a:solidFill>
+                  <a:srgbClr val="3D3A36"/>
+                </a:solidFill>
+                <a:latin typeface="Calibri" pitchFamily="34" charset="0"/>
+                <a:ea typeface="Calibri" pitchFamily="34" charset="-122"/>
+                <a:cs typeface="Calibri" pitchFamily="34" charset="-120"/>
+              </a:rPr>
+              <a:t>Friction converts kinetic energy into heat.</a:t>
+            </a:r>
+            <a:endParaRPr lang="en-US" sz="1600" dirty="0"/>
+          </a:p>
+        </p:txBody>
+      </p:sp>
+      <p:sp>
+        <p:nvSpPr>
+          <p:cNvPr id="6" name="Shape 4"/>
+          <p:cNvSpPr/>
+          <p:nvPr/>
+        </p:nvSpPr>
+        <p:spPr>
+          <a:xfrm>
+            <a:off x="640080" y="4114800"/>
+            <a:ext cx="7863840" cy="731520"/>
+          </a:xfrm>
+          <a:prstGeom prst="rect">
+            <a:avLst/>
+          </a:prstGeom>
+          <a:solidFill>
+            <a:srgbClr val="E8F5F3"/>
           </a:solidFill>
           <a:ln/>
           <a:effectLst>
             <a:outerShdw sx="100000" sy="100000" kx="0" ky="0" algn="bl" rotWithShape="0" blurRad="76200" dist="25400" dir="8100000">
               <a:srgbClr val="000000">
-                <a:alpha val="8000"/>
+                <a:alpha val="12000"/>
               </a:srgbClr>
             </a:outerShdw>
           </a:effectLst>
@@ -1854,14 +2297,34 @@
       </p:sp>
       <p:sp>
         <p:nvSpPr>
-          <p:cNvPr id="6" name="Text 4"/>
-          <p:cNvSpPr/>
-          <p:nvPr/>
-        </p:nvSpPr>
-        <p:spPr>
-          <a:xfrm>
-            <a:off x="822960" y="1234440"/>
-            <a:ext cx="3383280" cy="365760"/>
+          <p:cNvPr id="7" name="Shape 5"/>
+          <p:cNvSpPr/>
+          <p:nvPr/>
+        </p:nvSpPr>
+        <p:spPr>
+          <a:xfrm>
+            <a:off x="640080" y="4114800"/>
+            <a:ext cx="64008" cy="731520"/>
+          </a:xfrm>
+          <a:prstGeom prst="rect">
+            <a:avLst/>
+          </a:prstGeom>
+          <a:solidFill>
+            <a:srgbClr val="C8372D"/>
+          </a:solidFill>
+          <a:ln/>
+        </p:spPr>
+      </p:sp>
+      <p:sp>
+        <p:nvSpPr>
+          <p:cNvPr id="8" name="Text 6"/>
+          <p:cNvSpPr/>
+          <p:nvPr/>
+        </p:nvSpPr>
+        <p:spPr>
+          <a:xfrm>
+            <a:off x="914400" y="4160520"/>
+            <a:ext cx="7406640" cy="640080"/>
           </a:xfrm>
           <a:prstGeom prst="rect">
             <a:avLst/>
@@ -1877,50 +2340,7 @@
               <a:buNone/>
             </a:pPr>
             <a:r>
-              <a:rPr lang="en-US" sz="1600" b="1" dirty="0">
-                <a:solidFill>
-                  <a:srgbClr val="C8372D"/>
-                </a:solidFill>
-                <a:latin typeface="Georgia" pitchFamily="34" charset="0"/>
-                <a:ea typeface="Georgia" pitchFamily="34" charset="-122"/>
-                <a:cs typeface="Georgia" pitchFamily="34" charset="-120"/>
-              </a:rPr>
-              <a:t>Useful Friction</a:t>
-            </a:r>
-            <a:endParaRPr lang="en-US" sz="1600" dirty="0"/>
-          </a:p>
-        </p:txBody>
-      </p:sp>
-      <p:sp>
-        <p:nvSpPr>
-          <p:cNvPr id="7" name="Text 5"/>
-          <p:cNvSpPr/>
-          <p:nvPr/>
-        </p:nvSpPr>
-        <p:spPr>
-          <a:xfrm>
-            <a:off x="822960" y="1691640"/>
-            <a:ext cx="3383280" cy="2743200"/>
-          </a:xfrm>
-          <a:prstGeom prst="rect">
-            <a:avLst/>
-          </a:prstGeom>
-          <a:noFill/>
-          <a:ln/>
-        </p:spPr>
-        <p:txBody>
-          <a:bodyPr wrap="square" rtlCol="0" anchor="t"/>
-          <a:lstStyle/>
-          <a:p>
-            <a:pPr marL="342900" indent="-342900">
-              <a:lnSpc>
-                <a:spcPct val="135000"/>
-              </a:lnSpc>
-              <a:buSzPct val="100000"/>
-              <a:buChar char="•"/>
-            </a:pPr>
-            <a:r>
-              <a:rPr lang="en-US" sz="1300" dirty="0">
+              <a:rPr lang="en-US" sz="1300" i="1" dirty="0">
                 <a:solidFill>
                   <a:srgbClr val="3D3A36"/>
                 </a:solidFill>
@@ -1928,244 +2348,7 @@
                 <a:ea typeface="Calibri" pitchFamily="34" charset="-122"/>
                 <a:cs typeface="Calibri" pitchFamily="34" charset="-120"/>
               </a:rPr>
-              <a:t>Walking (grip)</a:t>
-            </a:r>
-            <a:endParaRPr lang="en-US" sz="1300" dirty="0"/>
-          </a:p>
-          <a:p>
-            <a:pPr marL="342900" indent="-342900">
-              <a:lnSpc>
-                <a:spcPct val="135000"/>
-              </a:lnSpc>
-              <a:buSzPct val="100000"/>
-              <a:buChar char="•"/>
-            </a:pPr>
-            <a:r>
-              <a:rPr lang="en-US" sz="1300" dirty="0">
-                <a:solidFill>
-                  <a:srgbClr val="3D3A36"/>
-                </a:solidFill>
-                <a:latin typeface="Calibri" pitchFamily="34" charset="0"/>
-                <a:ea typeface="Calibri" pitchFamily="34" charset="-122"/>
-                <a:cs typeface="Calibri" pitchFamily="34" charset="-120"/>
-              </a:rPr>
-              <a:t>Braking a car</a:t>
-            </a:r>
-            <a:endParaRPr lang="en-US" sz="1300" dirty="0"/>
-          </a:p>
-          <a:p>
-            <a:pPr marL="342900" indent="-342900">
-              <a:lnSpc>
-                <a:spcPct val="135000"/>
-              </a:lnSpc>
-              <a:buSzPct val="100000"/>
-              <a:buChar char="•"/>
-            </a:pPr>
-            <a:r>
-              <a:rPr lang="en-US" sz="1300" dirty="0">
-                <a:solidFill>
-                  <a:srgbClr val="3D3A36"/>
-                </a:solidFill>
-                <a:latin typeface="Calibri" pitchFamily="34" charset="0"/>
-                <a:ea typeface="Calibri" pitchFamily="34" charset="-122"/>
-                <a:cs typeface="Calibri" pitchFamily="34" charset="-120"/>
-              </a:rPr>
-              <a:t>Writing with a pen</a:t>
-            </a:r>
-            <a:endParaRPr lang="en-US" sz="1300" dirty="0"/>
-          </a:p>
-          <a:p>
-            <a:pPr marL="342900" indent="-342900">
-              <a:lnSpc>
-                <a:spcPct val="135000"/>
-              </a:lnSpc>
-              <a:buSzPct val="100000"/>
-              <a:buChar char="•"/>
-            </a:pPr>
-            <a:r>
-              <a:rPr lang="en-US" sz="1300" dirty="0">
-                <a:solidFill>
-                  <a:srgbClr val="3D3A36"/>
-                </a:solidFill>
-                <a:latin typeface="Calibri" pitchFamily="34" charset="0"/>
-                <a:ea typeface="Calibri" pitchFamily="34" charset="-122"/>
-                <a:cs typeface="Calibri" pitchFamily="34" charset="-120"/>
-              </a:rPr>
-              <a:t>Holding objects</a:t>
-            </a:r>
-            <a:endParaRPr lang="en-US" sz="1300" dirty="0"/>
-          </a:p>
-        </p:txBody>
-      </p:sp>
-      <p:sp>
-        <p:nvSpPr>
-          <p:cNvPr id="8" name="Shape 6"/>
-          <p:cNvSpPr/>
-          <p:nvPr/>
-        </p:nvSpPr>
-        <p:spPr>
-          <a:xfrm>
-            <a:off x="4754880" y="1097280"/>
-            <a:ext cx="3749040" cy="3474720"/>
-          </a:xfrm>
-          <a:prstGeom prst="roundRect">
-            <a:avLst>
-              <a:gd name="adj" fmla="val 2632"/>
-            </a:avLst>
-          </a:prstGeom>
-          <a:solidFill>
-            <a:srgbClr val="FFFFFF"/>
-          </a:solidFill>
-          <a:ln/>
-          <a:effectLst>
-            <a:outerShdw sx="100000" sy="100000" kx="0" ky="0" algn="bl" rotWithShape="0" blurRad="76200" dist="25400" dir="8100000">
-              <a:srgbClr val="000000">
-                <a:alpha val="8000"/>
-              </a:srgbClr>
-            </a:outerShdw>
-          </a:effectLst>
-        </p:spPr>
-      </p:sp>
-      <p:sp>
-        <p:nvSpPr>
-          <p:cNvPr id="9" name="Text 7"/>
-          <p:cNvSpPr/>
-          <p:nvPr/>
-        </p:nvSpPr>
-        <p:spPr>
-          <a:xfrm>
-            <a:off x="4937760" y="1234440"/>
-            <a:ext cx="3383280" cy="365760"/>
-          </a:xfrm>
-          <a:prstGeom prst="rect">
-            <a:avLst/>
-          </a:prstGeom>
-          <a:noFill/>
-          <a:ln/>
-        </p:spPr>
-        <p:txBody>
-          <a:bodyPr wrap="square" rtlCol="0" anchor="ctr"/>
-          <a:lstStyle/>
-          <a:p>
-            <a:pPr indent="0" marL="0">
-              <a:buNone/>
-            </a:pPr>
-            <a:r>
-              <a:rPr lang="en-US" sz="1600" b="1" dirty="0">
-                <a:solidFill>
-                  <a:srgbClr val="C8372D"/>
-                </a:solidFill>
-                <a:latin typeface="Georgia" pitchFamily="34" charset="0"/>
-                <a:ea typeface="Georgia" pitchFamily="34" charset="-122"/>
-                <a:cs typeface="Georgia" pitchFamily="34" charset="-120"/>
-              </a:rPr>
-              <a:t>Unwanted Friction</a:t>
-            </a:r>
-            <a:endParaRPr lang="en-US" sz="1600" dirty="0"/>
-          </a:p>
-        </p:txBody>
-      </p:sp>
-      <p:sp>
-        <p:nvSpPr>
-          <p:cNvPr id="10" name="Text 8"/>
-          <p:cNvSpPr/>
-          <p:nvPr/>
-        </p:nvSpPr>
-        <p:spPr>
-          <a:xfrm>
-            <a:off x="4937760" y="1691640"/>
-            <a:ext cx="3383280" cy="2743200"/>
-          </a:xfrm>
-          <a:prstGeom prst="rect">
-            <a:avLst/>
-          </a:prstGeom>
-          <a:noFill/>
-          <a:ln/>
-        </p:spPr>
-        <p:txBody>
-          <a:bodyPr wrap="square" rtlCol="0" anchor="t"/>
-          <a:lstStyle/>
-          <a:p>
-            <a:pPr marL="342900" indent="-342900">
-              <a:lnSpc>
-                <a:spcPct val="135000"/>
-              </a:lnSpc>
-              <a:buSzPct val="100000"/>
-              <a:buChar char="•"/>
-            </a:pPr>
-            <a:r>
-              <a:rPr lang="en-US" sz="1300" dirty="0">
-                <a:solidFill>
-                  <a:srgbClr val="3D3A36"/>
-                </a:solidFill>
-                <a:latin typeface="Calibri" pitchFamily="34" charset="0"/>
-                <a:ea typeface="Calibri" pitchFamily="34" charset="-122"/>
-                <a:cs typeface="Calibri" pitchFamily="34" charset="-120"/>
-              </a:rPr>
-              <a:t>Engine parts wearing</a:t>
-            </a:r>
-            <a:endParaRPr lang="en-US" sz="1300" dirty="0"/>
-          </a:p>
-          <a:p>
-            <a:pPr marL="342900" indent="-342900">
-              <a:lnSpc>
-                <a:spcPct val="135000"/>
-              </a:lnSpc>
-              <a:buSzPct val="100000"/>
-              <a:buChar char="•"/>
-            </a:pPr>
-            <a:r>
-              <a:rPr lang="en-US" sz="1300" dirty="0">
-                <a:solidFill>
-                  <a:srgbClr val="3D3A36"/>
-                </a:solidFill>
-                <a:latin typeface="Calibri" pitchFamily="34" charset="0"/>
-                <a:ea typeface="Calibri" pitchFamily="34" charset="-122"/>
-                <a:cs typeface="Calibri" pitchFamily="34" charset="-120"/>
-              </a:rPr>
-              <a:t>Energy wasted as heat</a:t>
-            </a:r>
-            <a:endParaRPr lang="en-US" sz="1300" dirty="0"/>
-          </a:p>
-          <a:p>
-            <a:pPr marL="342900" indent="-342900">
-              <a:lnSpc>
-                <a:spcPct val="135000"/>
-              </a:lnSpc>
-              <a:buSzPct val="100000"/>
-              <a:buChar char="•"/>
-            </a:pPr>
-            <a:r>
-              <a:rPr lang="en-US" sz="1300" dirty="0">
-                <a:solidFill>
-                  <a:srgbClr val="3D3A36"/>
-                </a:solidFill>
-                <a:latin typeface="Calibri" pitchFamily="34" charset="0"/>
-                <a:ea typeface="Calibri" pitchFamily="34" charset="-122"/>
-                <a:cs typeface="Calibri" pitchFamily="34" charset="-120"/>
-              </a:rPr>
-              <a:t>Slowing down machines</a:t>
-            </a:r>
-            <a:endParaRPr lang="en-US" sz="1300" dirty="0"/>
-          </a:p>
-          <a:p>
-            <a:pPr marL="342900" indent="-342900">
-              <a:lnSpc>
-                <a:spcPct val="135000"/>
-              </a:lnSpc>
-              <a:buSzPct val="100000"/>
-              <a:buChar char="•"/>
-            </a:pPr>
-            <a:r>
-              <a:rPr lang="en-US" sz="1300" dirty="0">
-                <a:solidFill>
-                  <a:srgbClr val="3D3A36"/>
-                </a:solidFill>
-                <a:latin typeface="Calibri" pitchFamily="34" charset="0"/>
-                <a:ea typeface="Calibri" pitchFamily="34" charset="-122"/>
-                <a:cs typeface="Calibri" pitchFamily="34" charset="-120"/>
-              </a:rPr>
-              <a:t>Reduced by lubricants</a:t>
+              <a:t>Rub your hands together — the warmth is from friction.</a:t>
             </a:r>
             <a:endParaRPr lang="en-US" sz="1300" dirty="0"/>
           </a:p>
@@ -2182,6 +2365,13 @@
 <file path=ppt/slides/slide4.xml><?xml version="1.0" encoding="utf-8"?>
 <p:sld xmlns:a="http://schemas.openxmlformats.org/drawingml/2006/main" xmlns:r="http://schemas.openxmlformats.org/officeDocument/2006/relationships" xmlns:p="http://schemas.openxmlformats.org/presentationml/2006/main">
   <p:cSld name="Slide 4">
+    <p:bg>
+      <p:bgPr>
+        <a:solidFill>
+          <a:srgbClr val="FAF8F5"/>
+        </a:solidFill>
+      </p:bgPr>
+    </p:bg>
     <p:spTree>
       <p:nvGrpSpPr>
         <p:cNvPr id="1" name=""/>
@@ -2205,13 +2395,13 @@
         <p:spPr>
           <a:xfrm>
             <a:off x="0" y="0"/>
-            <a:ext cx="9144000" cy="5143500"/>
-          </a:xfrm>
-          <a:prstGeom prst="rect">
-            <a:avLst/>
-          </a:prstGeom>
-          <a:solidFill>
-            <a:srgbClr val="FAF8F5"/>
+            <a:ext cx="9144000" cy="822960"/>
+          </a:xfrm>
+          <a:prstGeom prst="rect">
+            <a:avLst/>
+          </a:prstGeom>
+          <a:solidFill>
+            <a:srgbClr val="FFFFFF"/>
           </a:solidFill>
           <a:ln/>
         </p:spPr>
@@ -2224,8 +2414,8 @@
         </p:nvSpPr>
         <p:spPr>
           <a:xfrm>
-            <a:off x="0" y="0"/>
-            <a:ext cx="9144000" cy="54864"/>
+            <a:off x="0" y="795528"/>
+            <a:ext cx="9144000" cy="27432"/>
           </a:xfrm>
           <a:prstGeom prst="rect">
             <a:avLst/>
@@ -2244,7 +2434,7 @@
         </p:nvSpPr>
         <p:spPr>
           <a:xfrm>
-            <a:off x="640080" y="320040"/>
+            <a:off x="640080" y="91440"/>
             <a:ext cx="7863840" cy="640080"/>
           </a:xfrm>
           <a:prstGeom prst="rect">
@@ -2261,7 +2451,7 @@
               <a:buNone/>
             </a:pPr>
             <a:r>
-              <a:rPr lang="en-US" sz="2600" b="1" dirty="0">
+              <a:rPr lang="en-US" sz="2200" b="1" dirty="0">
                 <a:solidFill>
                   <a:srgbClr val="1B2A4A"/>
                 </a:solidFill>
@@ -2269,22 +2459,69 @@
                 <a:ea typeface="Georgia" pitchFamily="34" charset="-122"/>
                 <a:cs typeface="Georgia" pitchFamily="34" charset="-120"/>
               </a:rPr>
-              <a:t>Terminal Velocity</a:t>
-            </a:r>
-            <a:endParaRPr lang="en-US" sz="2600" dirty="0"/>
-          </a:p>
-        </p:txBody>
-      </p:sp>
-      <p:sp>
-        <p:nvSpPr>
-          <p:cNvPr id="5" name="Text 3"/>
+              <a:t>Friction: Helpful or Harmful?</a:t>
+            </a:r>
+            <a:endParaRPr lang="en-US" sz="2200" dirty="0"/>
+          </a:p>
+        </p:txBody>
+      </p:sp>
+      <p:sp>
+        <p:nvSpPr>
+          <p:cNvPr id="5" name="Shape 3"/>
+          <p:cNvSpPr/>
+          <p:nvPr/>
+        </p:nvSpPr>
+        <p:spPr>
+          <a:xfrm>
+            <a:off x="457200" y="1005840"/>
+            <a:ext cx="3931920" cy="3657600"/>
+          </a:xfrm>
+          <a:prstGeom prst="rect">
+            <a:avLst/>
+          </a:prstGeom>
+          <a:solidFill>
+            <a:srgbClr val="FFFFFF"/>
+          </a:solidFill>
+          <a:ln/>
+          <a:effectLst>
+            <a:outerShdw sx="100000" sy="100000" kx="0" ky="0" algn="bl" rotWithShape="0" blurRad="76200" dist="25400" dir="8100000">
+              <a:srgbClr val="000000">
+                <a:alpha val="12000"/>
+              </a:srgbClr>
+            </a:outerShdw>
+          </a:effectLst>
+        </p:spPr>
+      </p:sp>
+      <p:sp>
+        <p:nvSpPr>
+          <p:cNvPr id="6" name="Shape 4"/>
+          <p:cNvSpPr/>
+          <p:nvPr/>
+        </p:nvSpPr>
+        <p:spPr>
+          <a:xfrm>
+            <a:off x="457200" y="1005840"/>
+            <a:ext cx="3931920" cy="64008"/>
+          </a:xfrm>
+          <a:prstGeom prst="rect">
+            <a:avLst/>
+          </a:prstGeom>
+          <a:solidFill>
+            <a:srgbClr val="C8372D"/>
+          </a:solidFill>
+          <a:ln/>
+        </p:spPr>
+      </p:sp>
+      <p:sp>
+        <p:nvSpPr>
+          <p:cNvPr id="7" name="Text 5"/>
           <p:cNvSpPr/>
           <p:nvPr/>
         </p:nvSpPr>
         <p:spPr>
           <a:xfrm>
             <a:off x="640080" y="1188720"/>
-            <a:ext cx="7863840" cy="3200400"/>
+            <a:ext cx="3566160" cy="457200"/>
           </a:xfrm>
           <a:prstGeom prst="rect">
             <a:avLst/>
@@ -2293,39 +2530,57 @@
           <a:ln/>
         </p:spPr>
         <p:txBody>
-          <a:bodyPr wrap="square" rtlCol="0" anchor="t"/>
-          <a:lstStyle/>
-          <a:p>
-            <a:pPr marL="342900" indent="-342900">
-              <a:lnSpc>
-                <a:spcPct val="140000"/>
-              </a:lnSpc>
-              <a:buSzPct val="100000"/>
-              <a:buChar char="•"/>
-            </a:pPr>
-            <a:r>
-              <a:rPr lang="en-US" sz="1500" dirty="0">
-                <a:solidFill>
-                  <a:srgbClr val="3D3A36"/>
+          <a:bodyPr wrap="square" rtlCol="0" anchor="ctr"/>
+          <a:lstStyle/>
+          <a:p>
+            <a:pPr indent="0" marL="0">
+              <a:buNone/>
+            </a:pPr>
+            <a:r>
+              <a:rPr lang="en-US" sz="1600" b="1" dirty="0">
+                <a:solidFill>
+                  <a:srgbClr val="C8372D"/>
                 </a:solidFill>
                 <a:latin typeface="Calibri" pitchFamily="34" charset="0"/>
                 <a:ea typeface="Calibri" pitchFamily="34" charset="-122"/>
                 <a:cs typeface="Calibri" pitchFamily="34" charset="-120"/>
               </a:rPr>
-              <a:t>When a skydiver jumps, gravity pulls them down.</a:t>
-            </a:r>
-            <a:endParaRPr lang="en-US" sz="1500" dirty="0"/>
-          </a:p>
+              <a:t>Helpful</a:t>
+            </a:r>
+            <a:endParaRPr lang="en-US" sz="1600" dirty="0"/>
+          </a:p>
+        </p:txBody>
+      </p:sp>
+      <p:sp>
+        <p:nvSpPr>
+          <p:cNvPr id="8" name="Text 6"/>
+          <p:cNvSpPr/>
+          <p:nvPr/>
+        </p:nvSpPr>
+        <p:spPr>
+          <a:xfrm>
+            <a:off x="640080" y="1691640"/>
+            <a:ext cx="3566160" cy="2743200"/>
+          </a:xfrm>
+          <a:prstGeom prst="rect">
+            <a:avLst/>
+          </a:prstGeom>
+          <a:noFill/>
+          <a:ln/>
+        </p:spPr>
+        <p:txBody>
+          <a:bodyPr wrap="square" rtlCol="0" anchor="ctr"/>
+          <a:lstStyle/>
           <a:p>
             <a:pPr marL="342900" indent="-342900">
-              <a:lnSpc>
-                <a:spcPct val="140000"/>
-              </a:lnSpc>
+              <a:spcAft>
+                <a:spcPts val="600"/>
+              </a:spcAft>
               <a:buSzPct val="100000"/>
               <a:buChar char="•"/>
             </a:pPr>
             <a:r>
-              <a:rPr lang="en-US" sz="1500" dirty="0">
+              <a:rPr lang="en-US" sz="1400" dirty="0">
                 <a:solidFill>
                   <a:srgbClr val="3D3A36"/>
                 </a:solidFill>
@@ -2333,20 +2588,20 @@
                 <a:ea typeface="Calibri" pitchFamily="34" charset="-122"/>
                 <a:cs typeface="Calibri" pitchFamily="34" charset="-120"/>
               </a:rPr>
-              <a:t>As speed increases, air resistance increases.</a:t>
-            </a:r>
-            <a:endParaRPr lang="en-US" sz="1500" dirty="0"/>
+              <a:t>Walking — shoes grip the floor.</a:t>
+            </a:r>
+            <a:endParaRPr lang="en-US" sz="1400" dirty="0"/>
           </a:p>
           <a:p>
             <a:pPr marL="342900" indent="-342900">
-              <a:lnSpc>
-                <a:spcPct val="140000"/>
-              </a:lnSpc>
+              <a:spcAft>
+                <a:spcPts val="600"/>
+              </a:spcAft>
               <a:buSzPct val="100000"/>
               <a:buChar char="•"/>
             </a:pPr>
             <a:r>
-              <a:rPr lang="en-US" sz="1500" dirty="0">
+              <a:rPr lang="en-US" sz="1400" dirty="0">
                 <a:solidFill>
                   <a:srgbClr val="3D3A36"/>
                 </a:solidFill>
@@ -2354,20 +2609,20 @@
                 <a:ea typeface="Calibri" pitchFamily="34" charset="-122"/>
                 <a:cs typeface="Calibri" pitchFamily="34" charset="-120"/>
               </a:rPr>
-              <a:t>Eventually air resistance = weight → forces are balanced.</a:t>
-            </a:r>
-            <a:endParaRPr lang="en-US" sz="1500" dirty="0"/>
+              <a:t>Brakes — pads grip the wheel.</a:t>
+            </a:r>
+            <a:endParaRPr lang="en-US" sz="1400" dirty="0"/>
           </a:p>
           <a:p>
             <a:pPr marL="342900" indent="-342900">
-              <a:lnSpc>
-                <a:spcPct val="140000"/>
-              </a:lnSpc>
+              <a:spcAft>
+                <a:spcPts val="600"/>
+              </a:spcAft>
               <a:buSzPct val="100000"/>
               <a:buChar char="•"/>
             </a:pPr>
             <a:r>
-              <a:rPr lang="en-US" sz="1500" dirty="0">
+              <a:rPr lang="en-US" sz="1400" dirty="0">
                 <a:solidFill>
                   <a:srgbClr val="3D3A36"/>
                 </a:solidFill>
@@ -2375,20 +2630,20 @@
                 <a:ea typeface="Calibri" pitchFamily="34" charset="-122"/>
                 <a:cs typeface="Calibri" pitchFamily="34" charset="-120"/>
               </a:rPr>
-              <a:t>The skydiver falls at a constant speed: terminal velocity.</a:t>
-            </a:r>
-            <a:endParaRPr lang="en-US" sz="1500" dirty="0"/>
+              <a:t>Chopsticks (筷子) grip food.</a:t>
+            </a:r>
+            <a:endParaRPr lang="en-US" sz="1400" dirty="0"/>
           </a:p>
           <a:p>
             <a:pPr marL="342900" indent="-342900">
-              <a:lnSpc>
-                <a:spcPct val="140000"/>
-              </a:lnSpc>
+              <a:spcAft>
+                <a:spcPts val="600"/>
+              </a:spcAft>
               <a:buSzPct val="100000"/>
               <a:buChar char="•"/>
             </a:pPr>
             <a:r>
-              <a:rPr lang="en-US" sz="1500" dirty="0">
+              <a:rPr lang="en-US" sz="1400" dirty="0">
                 <a:solidFill>
                   <a:srgbClr val="3D3A36"/>
                 </a:solidFill>
@@ -2396,9 +2651,201 @@
                 <a:ea typeface="Calibri" pitchFamily="34" charset="-122"/>
                 <a:cs typeface="Calibri" pitchFamily="34" charset="-120"/>
               </a:rPr>
-              <a:t>Opening a parachute increases surface area → more drag → slower terminal velocity.</a:t>
-            </a:r>
-            <a:endParaRPr lang="en-US" sz="1500" dirty="0"/>
+              <a:t>Writing — pencil grips paper.</a:t>
+            </a:r>
+            <a:endParaRPr lang="en-US" sz="1400" dirty="0"/>
+          </a:p>
+        </p:txBody>
+      </p:sp>
+      <p:sp>
+        <p:nvSpPr>
+          <p:cNvPr id="9" name="Shape 7"/>
+          <p:cNvSpPr/>
+          <p:nvPr/>
+        </p:nvSpPr>
+        <p:spPr>
+          <a:xfrm>
+            <a:off x="4754880" y="1005840"/>
+            <a:ext cx="3931920" cy="3657600"/>
+          </a:xfrm>
+          <a:prstGeom prst="rect">
+            <a:avLst/>
+          </a:prstGeom>
+          <a:solidFill>
+            <a:srgbClr val="FFFFFF"/>
+          </a:solidFill>
+          <a:ln/>
+          <a:effectLst>
+            <a:outerShdw sx="100000" sy="100000" kx="0" ky="0" algn="bl" rotWithShape="0" blurRad="76200" dist="25400" dir="8100000">
+              <a:srgbClr val="000000">
+                <a:alpha val="12000"/>
+              </a:srgbClr>
+            </a:outerShdw>
+          </a:effectLst>
+        </p:spPr>
+      </p:sp>
+      <p:sp>
+        <p:nvSpPr>
+          <p:cNvPr id="10" name="Shape 8"/>
+          <p:cNvSpPr/>
+          <p:nvPr/>
+        </p:nvSpPr>
+        <p:spPr>
+          <a:xfrm>
+            <a:off x="4754880" y="1005840"/>
+            <a:ext cx="3931920" cy="64008"/>
+          </a:xfrm>
+          <a:prstGeom prst="rect">
+            <a:avLst/>
+          </a:prstGeom>
+          <a:solidFill>
+            <a:srgbClr val="E9C46A"/>
+          </a:solidFill>
+          <a:ln/>
+        </p:spPr>
+      </p:sp>
+      <p:sp>
+        <p:nvSpPr>
+          <p:cNvPr id="11" name="Text 9"/>
+          <p:cNvSpPr/>
+          <p:nvPr/>
+        </p:nvSpPr>
+        <p:spPr>
+          <a:xfrm>
+            <a:off x="4937760" y="1188720"/>
+            <a:ext cx="3566160" cy="457200"/>
+          </a:xfrm>
+          <a:prstGeom prst="rect">
+            <a:avLst/>
+          </a:prstGeom>
+          <a:noFill/>
+          <a:ln/>
+        </p:spPr>
+        <p:txBody>
+          <a:bodyPr wrap="square" rtlCol="0" anchor="ctr"/>
+          <a:lstStyle/>
+          <a:p>
+            <a:pPr indent="0" marL="0">
+              <a:buNone/>
+            </a:pPr>
+            <a:r>
+              <a:rPr lang="en-US" sz="1600" b="1" dirty="0">
+                <a:solidFill>
+                  <a:srgbClr val="E9C46A"/>
+                </a:solidFill>
+                <a:latin typeface="Calibri" pitchFamily="34" charset="0"/>
+                <a:ea typeface="Calibri" pitchFamily="34" charset="-122"/>
+                <a:cs typeface="Calibri" pitchFamily="34" charset="-120"/>
+              </a:rPr>
+              <a:t>Harmful</a:t>
+            </a:r>
+            <a:endParaRPr lang="en-US" sz="1600" dirty="0"/>
+          </a:p>
+        </p:txBody>
+      </p:sp>
+      <p:sp>
+        <p:nvSpPr>
+          <p:cNvPr id="12" name="Text 10"/>
+          <p:cNvSpPr/>
+          <p:nvPr/>
+        </p:nvSpPr>
+        <p:spPr>
+          <a:xfrm>
+            <a:off x="4937760" y="1691640"/>
+            <a:ext cx="3566160" cy="2743200"/>
+          </a:xfrm>
+          <a:prstGeom prst="rect">
+            <a:avLst/>
+          </a:prstGeom>
+          <a:noFill/>
+          <a:ln/>
+        </p:spPr>
+        <p:txBody>
+          <a:bodyPr wrap="square" rtlCol="0" anchor="ctr"/>
+          <a:lstStyle/>
+          <a:p>
+            <a:pPr marL="342900" indent="-342900">
+              <a:spcAft>
+                <a:spcPts val="600"/>
+              </a:spcAft>
+              <a:buSzPct val="100000"/>
+              <a:buChar char="•"/>
+            </a:pPr>
+            <a:r>
+              <a:rPr lang="en-US" sz="1400" dirty="0">
+                <a:solidFill>
+                  <a:srgbClr val="3D3A36"/>
+                </a:solidFill>
+                <a:latin typeface="Calibri" pitchFamily="34" charset="0"/>
+                <a:ea typeface="Calibri" pitchFamily="34" charset="-122"/>
+                <a:cs typeface="Calibri" pitchFamily="34" charset="-120"/>
+              </a:rPr>
+              <a:t>Engine parts wear out.</a:t>
+            </a:r>
+            <a:endParaRPr lang="en-US" sz="1400" dirty="0"/>
+          </a:p>
+          <a:p>
+            <a:pPr marL="342900" indent="-342900">
+              <a:spcAft>
+                <a:spcPts val="600"/>
+              </a:spcAft>
+              <a:buSzPct val="100000"/>
+              <a:buChar char="•"/>
+            </a:pPr>
+            <a:r>
+              <a:rPr lang="en-US" sz="1400" dirty="0">
+                <a:solidFill>
+                  <a:srgbClr val="3D3A36"/>
+                </a:solidFill>
+                <a:latin typeface="Calibri" pitchFamily="34" charset="0"/>
+                <a:ea typeface="Calibri" pitchFamily="34" charset="-122"/>
+                <a:cs typeface="Calibri" pitchFamily="34" charset="-120"/>
+              </a:rPr>
+              <a:t>Tyres wear down.</a:t>
+            </a:r>
+            <a:endParaRPr lang="en-US" sz="1400" dirty="0"/>
+          </a:p>
+          <a:p>
+            <a:pPr marL="342900" indent="-342900">
+              <a:spcAft>
+                <a:spcPts val="600"/>
+              </a:spcAft>
+              <a:buSzPct val="100000"/>
+              <a:buChar char="•"/>
+            </a:pPr>
+            <a:r>
+              <a:rPr lang="en-US" sz="1400" dirty="0">
+                <a:solidFill>
+                  <a:srgbClr val="3D3A36"/>
+                </a:solidFill>
+                <a:latin typeface="Calibri" pitchFamily="34" charset="0"/>
+                <a:ea typeface="Calibri" pitchFamily="34" charset="-122"/>
+                <a:cs typeface="Calibri" pitchFamily="34" charset="-120"/>
+              </a:rPr>
+              <a:t>Moving heavy furniture is hard.</a:t>
+            </a:r>
+            <a:endParaRPr lang="en-US" sz="1400" dirty="0"/>
+          </a:p>
+          <a:p>
+            <a:pPr marL="342900" indent="-342900">
+              <a:spcAft>
+                <a:spcPts val="600"/>
+              </a:spcAft>
+              <a:buSzPct val="100000"/>
+              <a:buChar char="•"/>
+            </a:pPr>
+            <a:r>
+              <a:rPr lang="en-US" sz="1400" dirty="0">
+                <a:solidFill>
+                  <a:srgbClr val="3D3A36"/>
+                </a:solidFill>
+                <a:latin typeface="Calibri" pitchFamily="34" charset="0"/>
+                <a:ea typeface="Calibri" pitchFamily="34" charset="-122"/>
+                <a:cs typeface="Calibri" pitchFamily="34" charset="-120"/>
+              </a:rPr>
+              <a:t>Reduced with lubricants (oil, grease).</a:t>
+            </a:r>
+            <a:endParaRPr lang="en-US" sz="1400" dirty="0"/>
           </a:p>
         </p:txBody>
       </p:sp>
@@ -2413,6 +2860,13 @@
 <file path=ppt/slides/slide5.xml><?xml version="1.0" encoding="utf-8"?>
 <p:sld xmlns:a="http://schemas.openxmlformats.org/drawingml/2006/main" xmlns:r="http://schemas.openxmlformats.org/officeDocument/2006/relationships" xmlns:p="http://schemas.openxmlformats.org/presentationml/2006/main">
   <p:cSld name="Slide 5">
+    <p:bg>
+      <p:bgPr>
+        <a:solidFill>
+          <a:srgbClr val="FAF8F5"/>
+        </a:solidFill>
+      </p:bgPr>
+    </p:bg>
     <p:spTree>
       <p:nvGrpSpPr>
         <p:cNvPr id="1" name=""/>
@@ -2436,13 +2890,13 @@
         <p:spPr>
           <a:xfrm>
             <a:off x="0" y="0"/>
-            <a:ext cx="9144000" cy="5143500"/>
-          </a:xfrm>
-          <a:prstGeom prst="rect">
-            <a:avLst/>
-          </a:prstGeom>
-          <a:solidFill>
-            <a:srgbClr val="FAF8F5"/>
+            <a:ext cx="9144000" cy="822960"/>
+          </a:xfrm>
+          <a:prstGeom prst="rect">
+            <a:avLst/>
+          </a:prstGeom>
+          <a:solidFill>
+            <a:srgbClr val="FFFFFF"/>
           </a:solidFill>
           <a:ln/>
         </p:spPr>
@@ -2455,8 +2909,8 @@
         </p:nvSpPr>
         <p:spPr>
           <a:xfrm>
-            <a:off x="0" y="0"/>
-            <a:ext cx="9144000" cy="54864"/>
+            <a:off x="0" y="795528"/>
+            <a:ext cx="9144000" cy="27432"/>
           </a:xfrm>
           <a:prstGeom prst="rect">
             <a:avLst/>
@@ -2475,8 +2929,8 @@
         </p:nvSpPr>
         <p:spPr>
           <a:xfrm>
-            <a:off x="640080" y="320040"/>
-            <a:ext cx="7863840" cy="548640"/>
+            <a:off x="640080" y="91440"/>
+            <a:ext cx="7863840" cy="640080"/>
           </a:xfrm>
           <a:prstGeom prst="rect">
             <a:avLst/>
@@ -2492,7 +2946,7 @@
               <a:buNone/>
             </a:pPr>
             <a:r>
-              <a:rPr lang="en-US" sz="2600" b="1" dirty="0">
+              <a:rPr lang="en-US" sz="2200" b="1" dirty="0">
                 <a:solidFill>
                   <a:srgbClr val="1B2A4A"/>
                 </a:solidFill>
@@ -2500,708 +2954,139 @@
                 <a:ea typeface="Georgia" pitchFamily="34" charset="-122"/>
                 <a:cs typeface="Georgia" pitchFamily="34" charset="-120"/>
               </a:rPr>
-              <a:t>Key Terms</a:t>
-            </a:r>
-            <a:endParaRPr lang="en-US" sz="2600" dirty="0"/>
-          </a:p>
-        </p:txBody>
-      </p:sp>
-      <p:graphicFrame>
-        <p:nvGraphicFramePr>
-          <p:cNvPr id="6" name="Table 0"/>
-          <p:cNvGraphicFramePr>
-            <a:graphicFrameLocks noGrp="1"/>
-          </p:cNvGraphicFramePr>
-          <p:nvPr>
-            <p:extLst>
-              <p:ext uri="{D42A27DB-BD31-4B8C-83A1-F6EECF244321}">
-                <p14:modId xmlns:p14="http://schemas.microsoft.com/office/powerpoint/2010/main" val="1579011935"/>
-              </p:ext>
-            </p:extLst>
-          </p:nvPr>
-        </p:nvGraphicFramePr>
-        <p:xfrm>
-          <a:off x="640080" y="1051560"/>
-          <a:ext cx="7863840" cy="914400"/>
-        </p:xfrm>
-        <a:graphic>
-          <a:graphicData uri="http://schemas.openxmlformats.org/drawingml/2006/table">
-            <a:tbl>
-              <a:tblPr/>
-              <a:tblGrid>
-                <a:gridCol w="2560320"/>
-                <a:gridCol w="5303520"/>
-              </a:tblGrid>
-              <a:tr h="594360">
-                <a:tc>
-                  <a:txBody>
-                    <a:bodyPr/>
-                    <a:lstStyle/>
-                    <a:p>
-                      <a:pPr indent="0" marL="0">
-                        <a:buNone/>
-                      </a:pPr>
-                      <a:r>
-                        <a:rPr lang="en-US" sz="1300" b="1" dirty="0">
-                          <a:solidFill>
-                            <a:srgbClr val="FFFFFF"/>
-                          </a:solidFill>
-                          <a:latin typeface="Calibri" pitchFamily="34" charset="0"/>
-                          <a:ea typeface="Calibri" pitchFamily="34" charset="-122"/>
-                          <a:cs typeface="Calibri" pitchFamily="34" charset="-120"/>
-                        </a:rPr>
-                        <a:t>Term</a:t>
-                      </a:r>
-                      <a:endParaRPr lang="en-US" sz="1300" dirty="0">
-                        <a:latin typeface="Calibri" charset="0"/>
-                        <a:ea typeface="Calibri" charset="0"/>
-                        <a:cs typeface="Calibri" charset="0"/>
-                      </a:endParaRPr>
-                    </a:p>
-                  </a:txBody>
-                  <a:tcPr marL="91440" marR="91440" marT="45720" marB="45720">
-                    <a:lnL w="6350" cap="flat" cmpd="sng" algn="ctr">
-                      <a:solidFill>
-                        <a:srgbClr val="E5E2DC"/>
-                      </a:solidFill>
-                      <a:prstDash val="solid"/>
-                      <a:round/>
-                      <a:headEnd type="none" w="med" len="med"/>
-                      <a:tailEnd type="none" w="med" len="med"/>
-                    </a:lnL>
-                    <a:lnR w="6350" cap="flat" cmpd="sng" algn="ctr">
-                      <a:solidFill>
-                        <a:srgbClr val="E5E2DC"/>
-                      </a:solidFill>
-                      <a:prstDash val="solid"/>
-                      <a:round/>
-                      <a:headEnd type="none" w="med" len="med"/>
-                      <a:tailEnd type="none" w="med" len="med"/>
-                    </a:lnR>
-                    <a:lnT w="6350" cap="flat" cmpd="sng" algn="ctr">
-                      <a:solidFill>
-                        <a:srgbClr val="E5E2DC"/>
-                      </a:solidFill>
-                      <a:prstDash val="solid"/>
-                      <a:round/>
-                      <a:headEnd type="none" w="med" len="med"/>
-                      <a:tailEnd type="none" w="med" len="med"/>
-                    </a:lnT>
-                    <a:lnB w="6350" cap="flat" cmpd="sng" algn="ctr">
-                      <a:solidFill>
-                        <a:srgbClr val="E5E2DC"/>
-                      </a:solidFill>
-                      <a:prstDash val="solid"/>
-                      <a:round/>
-                      <a:headEnd type="none" w="med" len="med"/>
-                      <a:tailEnd type="none" w="med" len="med"/>
-                    </a:lnB>
-                    <a:solidFill>
-                      <a:srgbClr val="C8372D"/>
-                    </a:solidFill>
-                  </a:tcPr>
-                </a:tc>
-                <a:tc>
-                  <a:txBody>
-                    <a:bodyPr/>
-                    <a:lstStyle/>
-                    <a:p>
-                      <a:pPr indent="0" marL="0">
-                        <a:buNone/>
-                      </a:pPr>
-                      <a:r>
-                        <a:rPr lang="en-US" sz="1300" b="1" dirty="0">
-                          <a:solidFill>
-                            <a:srgbClr val="FFFFFF"/>
-                          </a:solidFill>
-                          <a:latin typeface="Calibri" pitchFamily="34" charset="0"/>
-                          <a:ea typeface="Calibri" pitchFamily="34" charset="-122"/>
-                          <a:cs typeface="Calibri" pitchFamily="34" charset="-120"/>
-                        </a:rPr>
-                        <a:t>Definition</a:t>
-                      </a:r>
-                      <a:endParaRPr lang="en-US" sz="1300" dirty="0">
-                        <a:latin typeface="Calibri" charset="0"/>
-                        <a:ea typeface="Calibri" charset="0"/>
-                        <a:cs typeface="Calibri" charset="0"/>
-                      </a:endParaRPr>
-                    </a:p>
-                  </a:txBody>
-                  <a:tcPr marL="91440" marR="91440" marT="45720" marB="45720">
-                    <a:lnL w="6350" cap="flat" cmpd="sng" algn="ctr">
-                      <a:solidFill>
-                        <a:srgbClr val="E5E2DC"/>
-                      </a:solidFill>
-                      <a:prstDash val="solid"/>
-                      <a:round/>
-                      <a:headEnd type="none" w="med" len="med"/>
-                      <a:tailEnd type="none" w="med" len="med"/>
-                    </a:lnL>
-                    <a:lnR w="6350" cap="flat" cmpd="sng" algn="ctr">
-                      <a:solidFill>
-                        <a:srgbClr val="E5E2DC"/>
-                      </a:solidFill>
-                      <a:prstDash val="solid"/>
-                      <a:round/>
-                      <a:headEnd type="none" w="med" len="med"/>
-                      <a:tailEnd type="none" w="med" len="med"/>
-                    </a:lnR>
-                    <a:lnT w="6350" cap="flat" cmpd="sng" algn="ctr">
-                      <a:solidFill>
-                        <a:srgbClr val="E5E2DC"/>
-                      </a:solidFill>
-                      <a:prstDash val="solid"/>
-                      <a:round/>
-                      <a:headEnd type="none" w="med" len="med"/>
-                      <a:tailEnd type="none" w="med" len="med"/>
-                    </a:lnT>
-                    <a:lnB w="6350" cap="flat" cmpd="sng" algn="ctr">
-                      <a:solidFill>
-                        <a:srgbClr val="E5E2DC"/>
-                      </a:solidFill>
-                      <a:prstDash val="solid"/>
-                      <a:round/>
-                      <a:headEnd type="none" w="med" len="med"/>
-                      <a:tailEnd type="none" w="med" len="med"/>
-                    </a:lnB>
-                    <a:solidFill>
-                      <a:srgbClr val="C8372D"/>
-                    </a:solidFill>
-                  </a:tcPr>
-                </a:tc>
-              </a:tr>
-              <a:tr h="594360">
-                <a:tc>
-                  <a:txBody>
-                    <a:bodyPr/>
-                    <a:lstStyle/>
-                    <a:p>
-                      <a:pPr indent="0" marL="0">
-                        <a:buNone/>
-                      </a:pPr>
-                      <a:r>
-                        <a:rPr lang="en-US" sz="1300" b="1" dirty="0">
-                          <a:solidFill>
-                            <a:srgbClr val="1B2A4A"/>
-                          </a:solidFill>
-                          <a:latin typeface="Calibri" pitchFamily="34" charset="0"/>
-                          <a:ea typeface="Calibri" pitchFamily="34" charset="-122"/>
-                          <a:cs typeface="Calibri" pitchFamily="34" charset="-120"/>
-                        </a:rPr>
-                        <a:t>Friction</a:t>
-                      </a:r>
-                      <a:endParaRPr lang="en-US" sz="1300" dirty="0">
-                        <a:latin typeface="Calibri" charset="0"/>
-                        <a:ea typeface="Calibri" charset="0"/>
-                        <a:cs typeface="Calibri" charset="0"/>
-                      </a:endParaRPr>
-                    </a:p>
-                  </a:txBody>
-                  <a:tcPr marL="91440" marR="91440" marT="45720" marB="45720">
-                    <a:lnL w="6350" cap="flat" cmpd="sng" algn="ctr">
-                      <a:solidFill>
-                        <a:srgbClr val="E5E2DC"/>
-                      </a:solidFill>
-                      <a:prstDash val="solid"/>
-                      <a:round/>
-                      <a:headEnd type="none" w="med" len="med"/>
-                      <a:tailEnd type="none" w="med" len="med"/>
-                    </a:lnL>
-                    <a:lnR w="6350" cap="flat" cmpd="sng" algn="ctr">
-                      <a:solidFill>
-                        <a:srgbClr val="E5E2DC"/>
-                      </a:solidFill>
-                      <a:prstDash val="solid"/>
-                      <a:round/>
-                      <a:headEnd type="none" w="med" len="med"/>
-                      <a:tailEnd type="none" w="med" len="med"/>
-                    </a:lnR>
-                    <a:lnT w="6350" cap="flat" cmpd="sng" algn="ctr">
-                      <a:solidFill>
-                        <a:srgbClr val="E5E2DC"/>
-                      </a:solidFill>
-                      <a:prstDash val="solid"/>
-                      <a:round/>
-                      <a:headEnd type="none" w="med" len="med"/>
-                      <a:tailEnd type="none" w="med" len="med"/>
-                    </a:lnT>
-                    <a:lnB w="6350" cap="flat" cmpd="sng" algn="ctr">
-                      <a:solidFill>
-                        <a:srgbClr val="E5E2DC"/>
-                      </a:solidFill>
-                      <a:prstDash val="solid"/>
-                      <a:round/>
-                      <a:headEnd type="none" w="med" len="med"/>
-                      <a:tailEnd type="none" w="med" len="med"/>
-                    </a:lnB>
-                  </a:tcPr>
-                </a:tc>
-                <a:tc>
-                  <a:txBody>
-                    <a:bodyPr/>
-                    <a:lstStyle/>
-                    <a:p>
-                      <a:pPr indent="0" marL="0">
-                        <a:buNone/>
-                      </a:pPr>
-                      <a:r>
-                        <a:rPr lang="en-US" sz="1300" dirty="0">
-                          <a:solidFill>
-                            <a:srgbClr val="3D3A36"/>
-                          </a:solidFill>
-                          <a:latin typeface="Calibri" pitchFamily="34" charset="0"/>
-                          <a:ea typeface="Calibri" pitchFamily="34" charset="-122"/>
-                          <a:cs typeface="Calibri" pitchFamily="34" charset="-120"/>
-                        </a:rPr>
-                        <a:t>Force opposing motion between surfaces</a:t>
-                      </a:r>
-                      <a:endParaRPr lang="en-US" sz="1300" dirty="0">
-                        <a:latin typeface="Calibri" charset="0"/>
-                        <a:ea typeface="Calibri" charset="0"/>
-                        <a:cs typeface="Calibri" charset="0"/>
-                      </a:endParaRPr>
-                    </a:p>
-                  </a:txBody>
-                  <a:tcPr marL="91440" marR="91440" marT="45720" marB="45720">
-                    <a:lnL w="6350" cap="flat" cmpd="sng" algn="ctr">
-                      <a:solidFill>
-                        <a:srgbClr val="E5E2DC"/>
-                      </a:solidFill>
-                      <a:prstDash val="solid"/>
-                      <a:round/>
-                      <a:headEnd type="none" w="med" len="med"/>
-                      <a:tailEnd type="none" w="med" len="med"/>
-                    </a:lnL>
-                    <a:lnR w="6350" cap="flat" cmpd="sng" algn="ctr">
-                      <a:solidFill>
-                        <a:srgbClr val="E5E2DC"/>
-                      </a:solidFill>
-                      <a:prstDash val="solid"/>
-                      <a:round/>
-                      <a:headEnd type="none" w="med" len="med"/>
-                      <a:tailEnd type="none" w="med" len="med"/>
-                    </a:lnR>
-                    <a:lnT w="6350" cap="flat" cmpd="sng" algn="ctr">
-                      <a:solidFill>
-                        <a:srgbClr val="E5E2DC"/>
-                      </a:solidFill>
-                      <a:prstDash val="solid"/>
-                      <a:round/>
-                      <a:headEnd type="none" w="med" len="med"/>
-                      <a:tailEnd type="none" w="med" len="med"/>
-                    </a:lnT>
-                    <a:lnB w="6350" cap="flat" cmpd="sng" algn="ctr">
-                      <a:solidFill>
-                        <a:srgbClr val="E5E2DC"/>
-                      </a:solidFill>
-                      <a:prstDash val="solid"/>
-                      <a:round/>
-                      <a:headEnd type="none" w="med" len="med"/>
-                      <a:tailEnd type="none" w="med" len="med"/>
-                    </a:lnB>
-                  </a:tcPr>
-                </a:tc>
-              </a:tr>
-              <a:tr h="594360">
-                <a:tc>
-                  <a:txBody>
-                    <a:bodyPr/>
-                    <a:lstStyle/>
-                    <a:p>
-                      <a:pPr indent="0" marL="0">
-                        <a:buNone/>
-                      </a:pPr>
-                      <a:r>
-                        <a:rPr lang="en-US" sz="1300" b="1" dirty="0">
-                          <a:solidFill>
-                            <a:srgbClr val="1B2A4A"/>
-                          </a:solidFill>
-                          <a:latin typeface="Calibri" pitchFamily="34" charset="0"/>
-                          <a:ea typeface="Calibri" pitchFamily="34" charset="-122"/>
-                          <a:cs typeface="Calibri" pitchFamily="34" charset="-120"/>
-                        </a:rPr>
-                        <a:t>Air resistance</a:t>
-                      </a:r>
-                      <a:endParaRPr lang="en-US" sz="1300" dirty="0">
-                        <a:latin typeface="Calibri" charset="0"/>
-                        <a:ea typeface="Calibri" charset="0"/>
-                        <a:cs typeface="Calibri" charset="0"/>
-                      </a:endParaRPr>
-                    </a:p>
-                  </a:txBody>
-                  <a:tcPr marL="91440" marR="91440" marT="45720" marB="45720">
-                    <a:lnL w="6350" cap="flat" cmpd="sng" algn="ctr">
-                      <a:solidFill>
-                        <a:srgbClr val="E5E2DC"/>
-                      </a:solidFill>
-                      <a:prstDash val="solid"/>
-                      <a:round/>
-                      <a:headEnd type="none" w="med" len="med"/>
-                      <a:tailEnd type="none" w="med" len="med"/>
-                    </a:lnL>
-                    <a:lnR w="6350" cap="flat" cmpd="sng" algn="ctr">
-                      <a:solidFill>
-                        <a:srgbClr val="E5E2DC"/>
-                      </a:solidFill>
-                      <a:prstDash val="solid"/>
-                      <a:round/>
-                      <a:headEnd type="none" w="med" len="med"/>
-                      <a:tailEnd type="none" w="med" len="med"/>
-                    </a:lnR>
-                    <a:lnT w="6350" cap="flat" cmpd="sng" algn="ctr">
-                      <a:solidFill>
-                        <a:srgbClr val="E5E2DC"/>
-                      </a:solidFill>
-                      <a:prstDash val="solid"/>
-                      <a:round/>
-                      <a:headEnd type="none" w="med" len="med"/>
-                      <a:tailEnd type="none" w="med" len="med"/>
-                    </a:lnT>
-                    <a:lnB w="6350" cap="flat" cmpd="sng" algn="ctr">
-                      <a:solidFill>
-                        <a:srgbClr val="E5E2DC"/>
-                      </a:solidFill>
-                      <a:prstDash val="solid"/>
-                      <a:round/>
-                      <a:headEnd type="none" w="med" len="med"/>
-                      <a:tailEnd type="none" w="med" len="med"/>
-                    </a:lnB>
-                  </a:tcPr>
-                </a:tc>
-                <a:tc>
-                  <a:txBody>
-                    <a:bodyPr/>
-                    <a:lstStyle/>
-                    <a:p>
-                      <a:pPr indent="0" marL="0">
-                        <a:buNone/>
-                      </a:pPr>
-                      <a:r>
-                        <a:rPr lang="en-US" sz="1300" dirty="0">
-                          <a:solidFill>
-                            <a:srgbClr val="3D3A36"/>
-                          </a:solidFill>
-                          <a:latin typeface="Calibri" pitchFamily="34" charset="0"/>
-                          <a:ea typeface="Calibri" pitchFamily="34" charset="-122"/>
-                          <a:cs typeface="Calibri" pitchFamily="34" charset="-120"/>
-                        </a:rPr>
-                        <a:t>Friction from air; increases with speed &amp; area</a:t>
-                      </a:r>
-                      <a:endParaRPr lang="en-US" sz="1300" dirty="0">
-                        <a:latin typeface="Calibri" charset="0"/>
-                        <a:ea typeface="Calibri" charset="0"/>
-                        <a:cs typeface="Calibri" charset="0"/>
-                      </a:endParaRPr>
-                    </a:p>
-                  </a:txBody>
-                  <a:tcPr marL="91440" marR="91440" marT="45720" marB="45720">
-                    <a:lnL w="6350" cap="flat" cmpd="sng" algn="ctr">
-                      <a:solidFill>
-                        <a:srgbClr val="E5E2DC"/>
-                      </a:solidFill>
-                      <a:prstDash val="solid"/>
-                      <a:round/>
-                      <a:headEnd type="none" w="med" len="med"/>
-                      <a:tailEnd type="none" w="med" len="med"/>
-                    </a:lnL>
-                    <a:lnR w="6350" cap="flat" cmpd="sng" algn="ctr">
-                      <a:solidFill>
-                        <a:srgbClr val="E5E2DC"/>
-                      </a:solidFill>
-                      <a:prstDash val="solid"/>
-                      <a:round/>
-                      <a:headEnd type="none" w="med" len="med"/>
-                      <a:tailEnd type="none" w="med" len="med"/>
-                    </a:lnR>
-                    <a:lnT w="6350" cap="flat" cmpd="sng" algn="ctr">
-                      <a:solidFill>
-                        <a:srgbClr val="E5E2DC"/>
-                      </a:solidFill>
-                      <a:prstDash val="solid"/>
-                      <a:round/>
-                      <a:headEnd type="none" w="med" len="med"/>
-                      <a:tailEnd type="none" w="med" len="med"/>
-                    </a:lnT>
-                    <a:lnB w="6350" cap="flat" cmpd="sng" algn="ctr">
-                      <a:solidFill>
-                        <a:srgbClr val="E5E2DC"/>
-                      </a:solidFill>
-                      <a:prstDash val="solid"/>
-                      <a:round/>
-                      <a:headEnd type="none" w="med" len="med"/>
-                      <a:tailEnd type="none" w="med" len="med"/>
-                    </a:lnB>
-                  </a:tcPr>
-                </a:tc>
-              </a:tr>
-              <a:tr h="594360">
-                <a:tc>
-                  <a:txBody>
-                    <a:bodyPr/>
-                    <a:lstStyle/>
-                    <a:p>
-                      <a:pPr indent="0" marL="0">
-                        <a:buNone/>
-                      </a:pPr>
-                      <a:r>
-                        <a:rPr lang="en-US" sz="1300" b="1" dirty="0">
-                          <a:solidFill>
-                            <a:srgbClr val="1B2A4A"/>
-                          </a:solidFill>
-                          <a:latin typeface="Calibri" pitchFamily="34" charset="0"/>
-                          <a:ea typeface="Calibri" pitchFamily="34" charset="-122"/>
-                          <a:cs typeface="Calibri" pitchFamily="34" charset="-120"/>
-                        </a:rPr>
-                        <a:t>Streamlined</a:t>
-                      </a:r>
-                      <a:endParaRPr lang="en-US" sz="1300" dirty="0">
-                        <a:latin typeface="Calibri" charset="0"/>
-                        <a:ea typeface="Calibri" charset="0"/>
-                        <a:cs typeface="Calibri" charset="0"/>
-                      </a:endParaRPr>
-                    </a:p>
-                  </a:txBody>
-                  <a:tcPr marL="91440" marR="91440" marT="45720" marB="45720">
-                    <a:lnL w="6350" cap="flat" cmpd="sng" algn="ctr">
-                      <a:solidFill>
-                        <a:srgbClr val="E5E2DC"/>
-                      </a:solidFill>
-                      <a:prstDash val="solid"/>
-                      <a:round/>
-                      <a:headEnd type="none" w="med" len="med"/>
-                      <a:tailEnd type="none" w="med" len="med"/>
-                    </a:lnL>
-                    <a:lnR w="6350" cap="flat" cmpd="sng" algn="ctr">
-                      <a:solidFill>
-                        <a:srgbClr val="E5E2DC"/>
-                      </a:solidFill>
-                      <a:prstDash val="solid"/>
-                      <a:round/>
-                      <a:headEnd type="none" w="med" len="med"/>
-                      <a:tailEnd type="none" w="med" len="med"/>
-                    </a:lnR>
-                    <a:lnT w="6350" cap="flat" cmpd="sng" algn="ctr">
-                      <a:solidFill>
-                        <a:srgbClr val="E5E2DC"/>
-                      </a:solidFill>
-                      <a:prstDash val="solid"/>
-                      <a:round/>
-                      <a:headEnd type="none" w="med" len="med"/>
-                      <a:tailEnd type="none" w="med" len="med"/>
-                    </a:lnT>
-                    <a:lnB w="6350" cap="flat" cmpd="sng" algn="ctr">
-                      <a:solidFill>
-                        <a:srgbClr val="E5E2DC"/>
-                      </a:solidFill>
-                      <a:prstDash val="solid"/>
-                      <a:round/>
-                      <a:headEnd type="none" w="med" len="med"/>
-                      <a:tailEnd type="none" w="med" len="med"/>
-                    </a:lnB>
-                  </a:tcPr>
-                </a:tc>
-                <a:tc>
-                  <a:txBody>
-                    <a:bodyPr/>
-                    <a:lstStyle/>
-                    <a:p>
-                      <a:pPr indent="0" marL="0">
-                        <a:buNone/>
-                      </a:pPr>
-                      <a:r>
-                        <a:rPr lang="en-US" sz="1300" dirty="0">
-                          <a:solidFill>
-                            <a:srgbClr val="3D3A36"/>
-                          </a:solidFill>
-                          <a:latin typeface="Calibri" pitchFamily="34" charset="0"/>
-                          <a:ea typeface="Calibri" pitchFamily="34" charset="-122"/>
-                          <a:cs typeface="Calibri" pitchFamily="34" charset="-120"/>
-                        </a:rPr>
-                        <a:t>Smooth shape that reduces air resistance</a:t>
-                      </a:r>
-                      <a:endParaRPr lang="en-US" sz="1300" dirty="0">
-                        <a:latin typeface="Calibri" charset="0"/>
-                        <a:ea typeface="Calibri" charset="0"/>
-                        <a:cs typeface="Calibri" charset="0"/>
-                      </a:endParaRPr>
-                    </a:p>
-                  </a:txBody>
-                  <a:tcPr marL="91440" marR="91440" marT="45720" marB="45720">
-                    <a:lnL w="6350" cap="flat" cmpd="sng" algn="ctr">
-                      <a:solidFill>
-                        <a:srgbClr val="E5E2DC"/>
-                      </a:solidFill>
-                      <a:prstDash val="solid"/>
-                      <a:round/>
-                      <a:headEnd type="none" w="med" len="med"/>
-                      <a:tailEnd type="none" w="med" len="med"/>
-                    </a:lnL>
-                    <a:lnR w="6350" cap="flat" cmpd="sng" algn="ctr">
-                      <a:solidFill>
-                        <a:srgbClr val="E5E2DC"/>
-                      </a:solidFill>
-                      <a:prstDash val="solid"/>
-                      <a:round/>
-                      <a:headEnd type="none" w="med" len="med"/>
-                      <a:tailEnd type="none" w="med" len="med"/>
-                    </a:lnR>
-                    <a:lnT w="6350" cap="flat" cmpd="sng" algn="ctr">
-                      <a:solidFill>
-                        <a:srgbClr val="E5E2DC"/>
-                      </a:solidFill>
-                      <a:prstDash val="solid"/>
-                      <a:round/>
-                      <a:headEnd type="none" w="med" len="med"/>
-                      <a:tailEnd type="none" w="med" len="med"/>
-                    </a:lnT>
-                    <a:lnB w="6350" cap="flat" cmpd="sng" algn="ctr">
-                      <a:solidFill>
-                        <a:srgbClr val="E5E2DC"/>
-                      </a:solidFill>
-                      <a:prstDash val="solid"/>
-                      <a:round/>
-                      <a:headEnd type="none" w="med" len="med"/>
-                      <a:tailEnd type="none" w="med" len="med"/>
-                    </a:lnB>
-                  </a:tcPr>
-                </a:tc>
-              </a:tr>
-              <a:tr h="594360">
-                <a:tc>
-                  <a:txBody>
-                    <a:bodyPr/>
-                    <a:lstStyle/>
-                    <a:p>
-                      <a:pPr indent="0" marL="0">
-                        <a:buNone/>
-                      </a:pPr>
-                      <a:r>
-                        <a:rPr lang="en-US" sz="1300" b="1" dirty="0">
-                          <a:solidFill>
-                            <a:srgbClr val="1B2A4A"/>
-                          </a:solidFill>
-                          <a:latin typeface="Calibri" pitchFamily="34" charset="0"/>
-                          <a:ea typeface="Calibri" pitchFamily="34" charset="-122"/>
-                          <a:cs typeface="Calibri" pitchFamily="34" charset="-120"/>
-                        </a:rPr>
-                        <a:t>Terminal velocity</a:t>
-                      </a:r>
-                      <a:endParaRPr lang="en-US" sz="1300" dirty="0">
-                        <a:latin typeface="Calibri" charset="0"/>
-                        <a:ea typeface="Calibri" charset="0"/>
-                        <a:cs typeface="Calibri" charset="0"/>
-                      </a:endParaRPr>
-                    </a:p>
-                  </a:txBody>
-                  <a:tcPr marL="91440" marR="91440" marT="45720" marB="45720">
-                    <a:lnL w="6350" cap="flat" cmpd="sng" algn="ctr">
-                      <a:solidFill>
-                        <a:srgbClr val="E5E2DC"/>
-                      </a:solidFill>
-                      <a:prstDash val="solid"/>
-                      <a:round/>
-                      <a:headEnd type="none" w="med" len="med"/>
-                      <a:tailEnd type="none" w="med" len="med"/>
-                    </a:lnL>
-                    <a:lnR w="6350" cap="flat" cmpd="sng" algn="ctr">
-                      <a:solidFill>
-                        <a:srgbClr val="E5E2DC"/>
-                      </a:solidFill>
-                      <a:prstDash val="solid"/>
-                      <a:round/>
-                      <a:headEnd type="none" w="med" len="med"/>
-                      <a:tailEnd type="none" w="med" len="med"/>
-                    </a:lnR>
-                    <a:lnT w="6350" cap="flat" cmpd="sng" algn="ctr">
-                      <a:solidFill>
-                        <a:srgbClr val="E5E2DC"/>
-                      </a:solidFill>
-                      <a:prstDash val="solid"/>
-                      <a:round/>
-                      <a:headEnd type="none" w="med" len="med"/>
-                      <a:tailEnd type="none" w="med" len="med"/>
-                    </a:lnT>
-                    <a:lnB w="6350" cap="flat" cmpd="sng" algn="ctr">
-                      <a:solidFill>
-                        <a:srgbClr val="E5E2DC"/>
-                      </a:solidFill>
-                      <a:prstDash val="solid"/>
-                      <a:round/>
-                      <a:headEnd type="none" w="med" len="med"/>
-                      <a:tailEnd type="none" w="med" len="med"/>
-                    </a:lnB>
-                  </a:tcPr>
-                </a:tc>
-                <a:tc>
-                  <a:txBody>
-                    <a:bodyPr/>
-                    <a:lstStyle/>
-                    <a:p>
-                      <a:pPr indent="0" marL="0">
-                        <a:buNone/>
-                      </a:pPr>
-                      <a:r>
-                        <a:rPr lang="en-US" sz="1300" dirty="0">
-                          <a:solidFill>
-                            <a:srgbClr val="3D3A36"/>
-                          </a:solidFill>
-                          <a:latin typeface="Calibri" pitchFamily="34" charset="0"/>
-                          <a:ea typeface="Calibri" pitchFamily="34" charset="-122"/>
-                          <a:cs typeface="Calibri" pitchFamily="34" charset="-120"/>
-                        </a:rPr>
-                        <a:t>When weight = air resistance; constant speed</a:t>
-                      </a:r>
-                      <a:endParaRPr lang="en-US" sz="1300" dirty="0">
-                        <a:latin typeface="Calibri" charset="0"/>
-                        <a:ea typeface="Calibri" charset="0"/>
-                        <a:cs typeface="Calibri" charset="0"/>
-                      </a:endParaRPr>
-                    </a:p>
-                  </a:txBody>
-                  <a:tcPr marL="91440" marR="91440" marT="45720" marB="45720">
-                    <a:lnL w="6350" cap="flat" cmpd="sng" algn="ctr">
-                      <a:solidFill>
-                        <a:srgbClr val="E5E2DC"/>
-                      </a:solidFill>
-                      <a:prstDash val="solid"/>
-                      <a:round/>
-                      <a:headEnd type="none" w="med" len="med"/>
-                      <a:tailEnd type="none" w="med" len="med"/>
-                    </a:lnL>
-                    <a:lnR w="6350" cap="flat" cmpd="sng" algn="ctr">
-                      <a:solidFill>
-                        <a:srgbClr val="E5E2DC"/>
-                      </a:solidFill>
-                      <a:prstDash val="solid"/>
-                      <a:round/>
-                      <a:headEnd type="none" w="med" len="med"/>
-                      <a:tailEnd type="none" w="med" len="med"/>
-                    </a:lnR>
-                    <a:lnT w="6350" cap="flat" cmpd="sng" algn="ctr">
-                      <a:solidFill>
-                        <a:srgbClr val="E5E2DC"/>
-                      </a:solidFill>
-                      <a:prstDash val="solid"/>
-                      <a:round/>
-                      <a:headEnd type="none" w="med" len="med"/>
-                      <a:tailEnd type="none" w="med" len="med"/>
-                    </a:lnT>
-                    <a:lnB w="6350" cap="flat" cmpd="sng" algn="ctr">
-                      <a:solidFill>
-                        <a:srgbClr val="E5E2DC"/>
-                      </a:solidFill>
-                      <a:prstDash val="solid"/>
-                      <a:round/>
-                      <a:headEnd type="none" w="med" len="med"/>
-                      <a:tailEnd type="none" w="med" len="med"/>
-                    </a:lnB>
-                  </a:tcPr>
-                </a:tc>
-              </a:tr>
-            </a:tbl>
-          </a:graphicData>
-        </a:graphic>
-      </p:graphicFrame>
+              <a:t>Air Resistance (Drag)</a:t>
+            </a:r>
+            <a:endParaRPr lang="en-US" sz="2200" dirty="0"/>
+          </a:p>
+        </p:txBody>
+      </p:sp>
+      <p:sp>
+        <p:nvSpPr>
+          <p:cNvPr id="5" name="Text 3"/>
+          <p:cNvSpPr/>
+          <p:nvPr/>
+        </p:nvSpPr>
+        <p:spPr>
+          <a:xfrm>
+            <a:off x="640080" y="1005840"/>
+            <a:ext cx="7863840" cy="2926080"/>
+          </a:xfrm>
+          <a:prstGeom prst="rect">
+            <a:avLst/>
+          </a:prstGeom>
+          <a:noFill/>
+          <a:ln/>
+        </p:spPr>
+        <p:txBody>
+          <a:bodyPr wrap="square" rtlCol="0" anchor="ctr"/>
+          <a:lstStyle/>
+          <a:p>
+            <a:pPr marL="342900" indent="-342900">
+              <a:spcAft>
+                <a:spcPts val="800"/>
+              </a:spcAft>
+              <a:buSzPct val="100000"/>
+              <a:buChar char="•"/>
+            </a:pPr>
+            <a:r>
+              <a:rPr lang="en-US" sz="1600" dirty="0">
+                <a:solidFill>
+                  <a:srgbClr val="3D3A36"/>
+                </a:solidFill>
+                <a:latin typeface="Calibri" pitchFamily="34" charset="0"/>
+                <a:ea typeface="Calibri" pitchFamily="34" charset="-122"/>
+                <a:cs typeface="Calibri" pitchFamily="34" charset="-120"/>
+              </a:rPr>
+              <a:t>Air resistance = friction between object and air.</a:t>
+            </a:r>
+            <a:endParaRPr lang="en-US" sz="1600" dirty="0"/>
+          </a:p>
+          <a:p>
+            <a:pPr marL="342900" indent="-342900">
+              <a:spcAft>
+                <a:spcPts val="800"/>
+              </a:spcAft>
+              <a:buSzPct val="100000"/>
+              <a:buChar char="•"/>
+            </a:pPr>
+            <a:r>
+              <a:rPr lang="en-US" sz="1600" dirty="0">
+                <a:solidFill>
+                  <a:srgbClr val="3D3A36"/>
+                </a:solidFill>
+                <a:latin typeface="Calibri" pitchFamily="34" charset="0"/>
+                <a:ea typeface="Calibri" pitchFamily="34" charset="-122"/>
+                <a:cs typeface="Calibri" pitchFamily="34" charset="-120"/>
+              </a:rPr>
+              <a:t>Faster speed = more air resistance.</a:t>
+            </a:r>
+            <a:endParaRPr lang="en-US" sz="1600" dirty="0"/>
+          </a:p>
+          <a:p>
+            <a:pPr marL="342900" indent="-342900">
+              <a:spcAft>
+                <a:spcPts val="800"/>
+              </a:spcAft>
+              <a:buSzPct val="100000"/>
+              <a:buChar char="•"/>
+            </a:pPr>
+            <a:r>
+              <a:rPr lang="en-US" sz="1600" dirty="0">
+                <a:solidFill>
+                  <a:srgbClr val="3D3A36"/>
+                </a:solidFill>
+                <a:latin typeface="Calibri" pitchFamily="34" charset="0"/>
+                <a:ea typeface="Calibri" pitchFamily="34" charset="-122"/>
+                <a:cs typeface="Calibri" pitchFamily="34" charset="-120"/>
+              </a:rPr>
+              <a:t>Larger surface area = more air resistance.</a:t>
+            </a:r>
+            <a:endParaRPr lang="en-US" sz="1600" dirty="0"/>
+          </a:p>
+          <a:p>
+            <a:pPr marL="342900" indent="-342900">
+              <a:spcAft>
+                <a:spcPts val="800"/>
+              </a:spcAft>
+              <a:buSzPct val="100000"/>
+              <a:buChar char="•"/>
+            </a:pPr>
+            <a:r>
+              <a:rPr lang="en-US" sz="1600" dirty="0">
+                <a:solidFill>
+                  <a:srgbClr val="3D3A36"/>
+                </a:solidFill>
+                <a:latin typeface="Calibri" pitchFamily="34" charset="0"/>
+                <a:ea typeface="Calibri" pitchFamily="34" charset="-122"/>
+                <a:cs typeface="Calibri" pitchFamily="34" charset="-120"/>
+              </a:rPr>
+              <a:t>Streamlined shapes reduce it.</a:t>
+            </a:r>
+            <a:endParaRPr lang="en-US" sz="1600" dirty="0"/>
+          </a:p>
+          <a:p>
+            <a:pPr marL="342900" indent="-342900">
+              <a:spcAft>
+                <a:spcPts val="800"/>
+              </a:spcAft>
+              <a:buSzPct val="100000"/>
+              <a:buChar char="•"/>
+            </a:pPr>
+            <a:r>
+              <a:rPr lang="en-US" sz="1600" dirty="0">
+                <a:solidFill>
+                  <a:srgbClr val="3D3A36"/>
+                </a:solidFill>
+                <a:latin typeface="Calibri" pitchFamily="34" charset="0"/>
+                <a:ea typeface="Calibri" pitchFamily="34" charset="-122"/>
+                <a:cs typeface="Calibri" pitchFamily="34" charset="-120"/>
+              </a:rPr>
+              <a:t>Parachutes work BY increasing air resistance.</a:t>
+            </a:r>
+            <a:endParaRPr lang="en-US" sz="1600" dirty="0"/>
+          </a:p>
+        </p:txBody>
+      </p:sp>
     </p:spTree>
   </p:cSld>
   <p:clrMapOvr>
@@ -3213,6 +3098,13 @@
 <file path=ppt/slides/slide6.xml><?xml version="1.0" encoding="utf-8"?>
 <p:sld xmlns:a="http://schemas.openxmlformats.org/drawingml/2006/main" xmlns:r="http://schemas.openxmlformats.org/officeDocument/2006/relationships" xmlns:p="http://schemas.openxmlformats.org/presentationml/2006/main">
   <p:cSld name="Slide 6">
+    <p:bg>
+      <p:bgPr>
+        <a:solidFill>
+          <a:srgbClr val="FAF8F5"/>
+        </a:solidFill>
+      </p:bgPr>
+    </p:bg>
     <p:spTree>
       <p:nvGrpSpPr>
         <p:cNvPr id="1" name=""/>
@@ -3236,13 +3128,13 @@
         <p:spPr>
           <a:xfrm>
             <a:off x="0" y="0"/>
-            <a:ext cx="9144000" cy="5143500"/>
-          </a:xfrm>
-          <a:prstGeom prst="rect">
-            <a:avLst/>
-          </a:prstGeom>
-          <a:solidFill>
-            <a:srgbClr val="1B2A4A"/>
+            <a:ext cx="9144000" cy="822960"/>
+          </a:xfrm>
+          <a:prstGeom prst="rect">
+            <a:avLst/>
+          </a:prstGeom>
+          <a:solidFill>
+            <a:srgbClr val="FFFFFF"/>
           </a:solidFill>
           <a:ln/>
         </p:spPr>
@@ -3255,8 +3147,8 @@
         </p:nvSpPr>
         <p:spPr>
           <a:xfrm>
-            <a:off x="0" y="4777740"/>
-            <a:ext cx="9144000" cy="365760"/>
+            <a:off x="0" y="795528"/>
+            <a:ext cx="9144000" cy="27432"/>
           </a:xfrm>
           <a:prstGeom prst="rect">
             <a:avLst/>
@@ -3275,8 +3167,8 @@
         </p:nvSpPr>
         <p:spPr>
           <a:xfrm>
-            <a:off x="731520" y="1371600"/>
-            <a:ext cx="7680960" cy="914400"/>
+            <a:off x="640080" y="91440"/>
+            <a:ext cx="7863840" cy="640080"/>
           </a:xfrm>
           <a:prstGeom prst="rect">
             <a:avLst/>
@@ -3285,24 +3177,24 @@
           <a:ln/>
         </p:spPr>
         <p:txBody>
-          <a:bodyPr wrap="square" rtlCol="0" anchor="ctr"/>
-          <a:lstStyle/>
-          <a:p>
-            <a:pPr algn="ctr" indent="0" marL="0">
+          <a:bodyPr wrap="square" lIns="0" tIns="0" rIns="0" bIns="0" rtlCol="0" anchor="ctr"/>
+          <a:lstStyle/>
+          <a:p>
+            <a:pPr indent="0" marL="0">
               <a:buNone/>
             </a:pPr>
             <a:r>
-              <a:rPr lang="en-US" sz="3600" b="1" dirty="0">
-                <a:solidFill>
-                  <a:srgbClr val="FFFFFF"/>
+              <a:rPr lang="en-US" sz="2200" b="1" dirty="0">
+                <a:solidFill>
+                  <a:srgbClr val="1B2A4A"/>
                 </a:solidFill>
                 <a:latin typeface="Georgia" pitchFamily="34" charset="0"/>
                 <a:ea typeface="Georgia" pitchFamily="34" charset="-122"/>
                 <a:cs typeface="Georgia" pitchFamily="34" charset="-120"/>
               </a:rPr>
-              <a:t>Review &amp; Practise</a:t>
-            </a:r>
-            <a:endParaRPr lang="en-US" sz="3600" dirty="0"/>
+              <a:t>Terminal Velocity</a:t>
+            </a:r>
+            <a:endParaRPr lang="en-US" sz="2200" dirty="0"/>
           </a:p>
         </p:txBody>
       </p:sp>
@@ -3314,8 +3206,8 @@
         </p:nvSpPr>
         <p:spPr>
           <a:xfrm>
-            <a:off x="731520" y="2468880"/>
-            <a:ext cx="7680960" cy="548640"/>
+            <a:off x="640080" y="1005840"/>
+            <a:ext cx="7863840" cy="2926080"/>
           </a:xfrm>
           <a:prstGeom prst="rect">
             <a:avLst/>
@@ -3327,60 +3219,980 @@
           <a:bodyPr wrap="square" rtlCol="0" anchor="ctr"/>
           <a:lstStyle/>
           <a:p>
-            <a:pPr algn="ctr" indent="0" marL="0">
-              <a:buNone/>
-            </a:pPr>
-            <a:r>
-              <a:rPr lang="en-US" sz="1800" dirty="0">
-                <a:solidFill>
-                  <a:srgbClr val="C8372D"/>
+            <a:pPr marL="342900" indent="-342900">
+              <a:spcAft>
+                <a:spcPts val="800"/>
+              </a:spcAft>
+              <a:buSzPct val="100000"/>
+              <a:buChar char="•"/>
+            </a:pPr>
+            <a:r>
+              <a:rPr lang="en-US" sz="1600" dirty="0">
+                <a:solidFill>
+                  <a:srgbClr val="3D3A36"/>
                 </a:solidFill>
                 <a:latin typeface="Calibri" pitchFamily="34" charset="0"/>
                 <a:ea typeface="Calibri" pitchFamily="34" charset="-122"/>
                 <a:cs typeface="Calibri" pitchFamily="34" charset="-120"/>
               </a:rPr>
-              <a:t>learnlattice.org/students/exam-revision</a:t>
-            </a:r>
-            <a:endParaRPr lang="en-US" sz="1800" dirty="0"/>
-          </a:p>
-        </p:txBody>
-      </p:sp>
-      <p:sp>
-        <p:nvSpPr>
-          <p:cNvPr id="6" name="Text 4"/>
-          <p:cNvSpPr/>
-          <p:nvPr/>
-        </p:nvSpPr>
-        <p:spPr>
-          <a:xfrm>
-            <a:off x="731520" y="3200400"/>
-            <a:ext cx="7680960" cy="457200"/>
-          </a:xfrm>
-          <a:prstGeom prst="rect">
-            <a:avLst/>
-          </a:prstGeom>
-          <a:noFill/>
-          <a:ln/>
-        </p:spPr>
-        <p:txBody>
-          <a:bodyPr wrap="square" rtlCol="0" anchor="ctr"/>
-          <a:lstStyle/>
-          <a:p>
-            <a:pPr algn="ctr" indent="0" marL="0">
-              <a:buNone/>
-            </a:pPr>
-            <a:r>
-              <a:rPr lang="en-US" sz="1400" dirty="0">
-                <a:solidFill>
-                  <a:srgbClr val="9B9690"/>
+              <a:t>Skydiver jumps — gravity pulls down.</a:t>
+            </a:r>
+            <a:endParaRPr lang="en-US" sz="1600" dirty="0"/>
+          </a:p>
+          <a:p>
+            <a:pPr marL="342900" indent="-342900">
+              <a:spcAft>
+                <a:spcPts val="800"/>
+              </a:spcAft>
+              <a:buSzPct val="100000"/>
+              <a:buChar char="•"/>
+            </a:pPr>
+            <a:r>
+              <a:rPr lang="en-US" sz="1600" dirty="0">
+                <a:solidFill>
+                  <a:srgbClr val="3D3A36"/>
                 </a:solidFill>
                 <a:latin typeface="Calibri" pitchFamily="34" charset="0"/>
                 <a:ea typeface="Calibri" pitchFamily="34" charset="-122"/>
                 <a:cs typeface="Calibri" pitchFamily="34" charset="-120"/>
               </a:rPr>
+              <a:t>As speed increases, air resistance increases.</a:t>
+            </a:r>
+            <a:endParaRPr lang="en-US" sz="1600" dirty="0"/>
+          </a:p>
+          <a:p>
+            <a:pPr marL="342900" indent="-342900">
+              <a:spcAft>
+                <a:spcPts val="800"/>
+              </a:spcAft>
+              <a:buSzPct val="100000"/>
+              <a:buChar char="•"/>
+            </a:pPr>
+            <a:r>
+              <a:rPr lang="en-US" sz="1600" dirty="0">
+                <a:solidFill>
+                  <a:srgbClr val="3D3A36"/>
+                </a:solidFill>
+                <a:latin typeface="Calibri" pitchFamily="34" charset="0"/>
+                <a:ea typeface="Calibri" pitchFamily="34" charset="-122"/>
+                <a:cs typeface="Calibri" pitchFamily="34" charset="-120"/>
+              </a:rPr>
+              <a:t>Eventually air resistance = gravity (balanced).</a:t>
+            </a:r>
+            <a:endParaRPr lang="en-US" sz="1600" dirty="0"/>
+          </a:p>
+          <a:p>
+            <a:pPr marL="342900" indent="-342900">
+              <a:spcAft>
+                <a:spcPts val="800"/>
+              </a:spcAft>
+              <a:buSzPct val="100000"/>
+              <a:buChar char="•"/>
+            </a:pPr>
+            <a:r>
+              <a:rPr lang="en-US" sz="1600" dirty="0">
+                <a:solidFill>
+                  <a:srgbClr val="3D3A36"/>
+                </a:solidFill>
+                <a:latin typeface="Calibri" pitchFamily="34" charset="0"/>
+                <a:ea typeface="Calibri" pitchFamily="34" charset="-122"/>
+                <a:cs typeface="Calibri" pitchFamily="34" charset="-120"/>
+              </a:rPr>
+              <a:t>Speed stays constant = terminal velocity.</a:t>
+            </a:r>
+            <a:endParaRPr lang="en-US" sz="1600" dirty="0"/>
+          </a:p>
+          <a:p>
+            <a:pPr marL="342900" indent="-342900">
+              <a:spcAft>
+                <a:spcPts val="800"/>
+              </a:spcAft>
+              <a:buSzPct val="100000"/>
+              <a:buChar char="•"/>
+            </a:pPr>
+            <a:r>
+              <a:rPr lang="en-US" sz="1600" dirty="0">
+                <a:solidFill>
+                  <a:srgbClr val="3D3A36"/>
+                </a:solidFill>
+                <a:latin typeface="Calibri" pitchFamily="34" charset="0"/>
+                <a:ea typeface="Calibri" pitchFamily="34" charset="-122"/>
+                <a:cs typeface="Calibri" pitchFamily="34" charset="-120"/>
+              </a:rPr>
+              <a:t>Parachute increases area → more drag → slower terminal velocity.</a:t>
+            </a:r>
+            <a:endParaRPr lang="en-US" sz="1600" dirty="0"/>
+          </a:p>
+        </p:txBody>
+      </p:sp>
+      <p:sp>
+        <p:nvSpPr>
+          <p:cNvPr id="6" name="Shape 4"/>
+          <p:cNvSpPr/>
+          <p:nvPr/>
+        </p:nvSpPr>
+        <p:spPr>
+          <a:xfrm>
+            <a:off x="640080" y="4114800"/>
+            <a:ext cx="7863840" cy="731520"/>
+          </a:xfrm>
+          <a:prstGeom prst="rect">
+            <a:avLst/>
+          </a:prstGeom>
+          <a:solidFill>
+            <a:srgbClr val="E8F5F3"/>
+          </a:solidFill>
+          <a:ln/>
+          <a:effectLst>
+            <a:outerShdw sx="100000" sy="100000" kx="0" ky="0" algn="bl" rotWithShape="0" blurRad="76200" dist="25400" dir="8100000">
+              <a:srgbClr val="000000">
+                <a:alpha val="12000"/>
+              </a:srgbClr>
+            </a:outerShdw>
+          </a:effectLst>
+        </p:spPr>
+      </p:sp>
+      <p:sp>
+        <p:nvSpPr>
+          <p:cNvPr id="7" name="Shape 5"/>
+          <p:cNvSpPr/>
+          <p:nvPr/>
+        </p:nvSpPr>
+        <p:spPr>
+          <a:xfrm>
+            <a:off x="640080" y="4114800"/>
+            <a:ext cx="64008" cy="731520"/>
+          </a:xfrm>
+          <a:prstGeom prst="rect">
+            <a:avLst/>
+          </a:prstGeom>
+          <a:solidFill>
+            <a:srgbClr val="C8372D"/>
+          </a:solidFill>
+          <a:ln/>
+        </p:spPr>
+      </p:sp>
+      <p:sp>
+        <p:nvSpPr>
+          <p:cNvPr id="8" name="Text 6"/>
+          <p:cNvSpPr/>
+          <p:nvPr/>
+        </p:nvSpPr>
+        <p:spPr>
+          <a:xfrm>
+            <a:off x="914400" y="4160520"/>
+            <a:ext cx="7406640" cy="640080"/>
+          </a:xfrm>
+          <a:prstGeom prst="rect">
+            <a:avLst/>
+          </a:prstGeom>
+          <a:noFill/>
+          <a:ln/>
+        </p:spPr>
+        <p:txBody>
+          <a:bodyPr wrap="square" rtlCol="0" anchor="ctr"/>
+          <a:lstStyle/>
+          <a:p>
+            <a:pPr indent="0" marL="0">
+              <a:buNone/>
+            </a:pPr>
+            <a:r>
+              <a:rPr lang="en-US" sz="1300" i="1" dirty="0">
+                <a:solidFill>
+                  <a:srgbClr val="3D3A36"/>
+                </a:solidFill>
+                <a:latin typeface="Calibri" pitchFamily="34" charset="0"/>
+                <a:ea typeface="Calibri" pitchFamily="34" charset="-122"/>
+                <a:cs typeface="Calibri" pitchFamily="34" charset="-120"/>
+              </a:rPr>
+              <a:t>Terminal velocity: skydiver ≈ 200 km/h. With parachute ≈ 25 km/h.</a:t>
+            </a:r>
+            <a:endParaRPr lang="en-US" sz="1300" dirty="0"/>
+          </a:p>
+        </p:txBody>
+      </p:sp>
+    </p:spTree>
+  </p:cSld>
+  <p:clrMapOvr>
+    <a:masterClrMapping/>
+  </p:clrMapOvr>
+</p:sld>
+</file>
+
+<file path=ppt/slides/slide7.xml><?xml version="1.0" encoding="utf-8"?>
+<p:sld xmlns:a="http://schemas.openxmlformats.org/drawingml/2006/main" xmlns:r="http://schemas.openxmlformats.org/officeDocument/2006/relationships" xmlns:p="http://schemas.openxmlformats.org/presentationml/2006/main">
+  <p:cSld name="Slide 7">
+    <p:bg>
+      <p:bgPr>
+        <a:solidFill>
+          <a:srgbClr val="FAF8F5"/>
+        </a:solidFill>
+      </p:bgPr>
+    </p:bg>
+    <p:spTree>
+      <p:nvGrpSpPr>
+        <p:cNvPr id="1" name=""/>
+        <p:cNvGrpSpPr/>
+        <p:nvPr/>
+      </p:nvGrpSpPr>
+      <p:grpSpPr>
+        <a:xfrm>
+          <a:off x="0" y="0"/>
+          <a:ext cx="0" cy="0"/>
+          <a:chOff x="0" y="0"/>
+          <a:chExt cx="0" cy="0"/>
+        </a:xfrm>
+      </p:grpSpPr>
+      <p:sp>
+        <p:nvSpPr>
+          <p:cNvPr id="2" name="Shape 0"/>
+          <p:cNvSpPr/>
+          <p:nvPr/>
+        </p:nvSpPr>
+        <p:spPr>
+          <a:xfrm>
+            <a:off x="0" y="0"/>
+            <a:ext cx="9144000" cy="822960"/>
+          </a:xfrm>
+          <a:prstGeom prst="rect">
+            <a:avLst/>
+          </a:prstGeom>
+          <a:solidFill>
+            <a:srgbClr val="FFFFFF"/>
+          </a:solidFill>
+          <a:ln/>
+        </p:spPr>
+      </p:sp>
+      <p:sp>
+        <p:nvSpPr>
+          <p:cNvPr id="3" name="Shape 1"/>
+          <p:cNvSpPr/>
+          <p:nvPr/>
+        </p:nvSpPr>
+        <p:spPr>
+          <a:xfrm>
+            <a:off x="0" y="795528"/>
+            <a:ext cx="9144000" cy="27432"/>
+          </a:xfrm>
+          <a:prstGeom prst="rect">
+            <a:avLst/>
+          </a:prstGeom>
+          <a:solidFill>
+            <a:srgbClr val="C8372D"/>
+          </a:solidFill>
+          <a:ln/>
+        </p:spPr>
+      </p:sp>
+      <p:sp>
+        <p:nvSpPr>
+          <p:cNvPr id="4" name="Text 2"/>
+          <p:cNvSpPr/>
+          <p:nvPr/>
+        </p:nvSpPr>
+        <p:spPr>
+          <a:xfrm>
+            <a:off x="640080" y="91440"/>
+            <a:ext cx="7863840" cy="640080"/>
+          </a:xfrm>
+          <a:prstGeom prst="rect">
+            <a:avLst/>
+          </a:prstGeom>
+          <a:noFill/>
+          <a:ln/>
+        </p:spPr>
+        <p:txBody>
+          <a:bodyPr wrap="square" lIns="0" tIns="0" rIns="0" bIns="0" rtlCol="0" anchor="ctr"/>
+          <a:lstStyle/>
+          <a:p>
+            <a:pPr indent="0" marL="0">
+              <a:buNone/>
+            </a:pPr>
+            <a:r>
+              <a:rPr lang="en-US" sz="2200" b="1" dirty="0">
+                <a:solidFill>
+                  <a:srgbClr val="1B2A4A"/>
+                </a:solidFill>
+                <a:latin typeface="Georgia" pitchFamily="34" charset="0"/>
+                <a:ea typeface="Georgia" pitchFamily="34" charset="-122"/>
+                <a:cs typeface="Georgia" pitchFamily="34" charset="-120"/>
+              </a:rPr>
+              <a:t>Recommended Videos</a:t>
+            </a:r>
+            <a:endParaRPr lang="en-US" sz="2200" dirty="0"/>
+          </a:p>
+        </p:txBody>
+      </p:sp>
+      <p:sp>
+        <p:nvSpPr>
+          <p:cNvPr id="5" name="Text 3"/>
+          <p:cNvSpPr/>
+          <p:nvPr/>
+        </p:nvSpPr>
+        <p:spPr>
+          <a:xfrm>
+            <a:off x="640080" y="868680"/>
+            <a:ext cx="7863840" cy="274320"/>
+          </a:xfrm>
+          <a:prstGeom prst="rect">
+            <a:avLst/>
+          </a:prstGeom>
+          <a:noFill/>
+          <a:ln/>
+        </p:spPr>
+        <p:txBody>
+          <a:bodyPr wrap="square" rtlCol="0" anchor="ctr"/>
+          <a:lstStyle/>
+          <a:p>
+            <a:pPr indent="0" marL="0">
+              <a:buNone/>
+            </a:pPr>
+            <a:r>
+              <a:rPr lang="en-US" sz="1200" i="1" dirty="0">
+                <a:solidFill>
+                  <a:srgbClr val="6B6660"/>
+                </a:solidFill>
+                <a:latin typeface="Calibri" pitchFamily="34" charset="0"/>
+                <a:ea typeface="Calibri" pitchFamily="34" charset="-122"/>
+                <a:cs typeface="Calibri" pitchFamily="34" charset="-120"/>
+              </a:rPr>
+              <a:t>Search these on YouTube to learn more.</a:t>
+            </a:r>
+            <a:endParaRPr lang="en-US" sz="1200" dirty="0"/>
+          </a:p>
+        </p:txBody>
+      </p:sp>
+      <p:sp>
+        <p:nvSpPr>
+          <p:cNvPr id="6" name="Shape 4"/>
+          <p:cNvSpPr/>
+          <p:nvPr/>
+        </p:nvSpPr>
+        <p:spPr>
+          <a:xfrm>
+            <a:off x="457200" y="1234440"/>
+            <a:ext cx="8229600" cy="1051560"/>
+          </a:xfrm>
+          <a:prstGeom prst="rect">
+            <a:avLst/>
+          </a:prstGeom>
+          <a:solidFill>
+            <a:srgbClr val="FFFFFF"/>
+          </a:solidFill>
+          <a:ln/>
+          <a:effectLst>
+            <a:outerShdw sx="100000" sy="100000" kx="0" ky="0" algn="bl" rotWithShape="0" blurRad="76200" dist="25400" dir="8100000">
+              <a:srgbClr val="000000">
+                <a:alpha val="12000"/>
+              </a:srgbClr>
+            </a:outerShdw>
+          </a:effectLst>
+        </p:spPr>
+      </p:sp>
+      <p:sp>
+        <p:nvSpPr>
+          <p:cNvPr id="7" name="Shape 5"/>
+          <p:cNvSpPr/>
+          <p:nvPr/>
+        </p:nvSpPr>
+        <p:spPr>
+          <a:xfrm>
+            <a:off x="457200" y="1234440"/>
+            <a:ext cx="64008" cy="1051560"/>
+          </a:xfrm>
+          <a:prstGeom prst="rect">
+            <a:avLst/>
+          </a:prstGeom>
+          <a:solidFill>
+            <a:srgbClr val="C8372D"/>
+          </a:solidFill>
+          <a:ln/>
+        </p:spPr>
+      </p:sp>
+      <p:sp>
+        <p:nvSpPr>
+          <p:cNvPr id="8" name="Text 6"/>
+          <p:cNvSpPr/>
+          <p:nvPr/>
+        </p:nvSpPr>
+        <p:spPr>
+          <a:xfrm>
+            <a:off x="640080" y="1325880"/>
+            <a:ext cx="457200" cy="457200"/>
+          </a:xfrm>
+          <a:prstGeom prst="rect">
+            <a:avLst/>
+          </a:prstGeom>
+          <a:noFill/>
+          <a:ln/>
+        </p:spPr>
+        <p:txBody>
+          <a:bodyPr wrap="square" rtlCol="0" anchor="ctr"/>
+          <a:lstStyle/>
+          <a:p>
+            <a:pPr algn="ctr" indent="0" marL="0">
+              <a:buNone/>
+            </a:pPr>
+            <a:r>
+              <a:rPr lang="en-US" sz="2000" dirty="0">
+                <a:solidFill>
+                  <a:srgbClr val="C8372D"/>
+                </a:solidFill>
+                <a:latin typeface="Calibri" pitchFamily="34" charset="0"/>
+                <a:ea typeface="Calibri" pitchFamily="34" charset="-122"/>
+                <a:cs typeface="Calibri" pitchFamily="34" charset="-120"/>
+              </a:rPr>
+              <a:t>▶</a:t>
+            </a:r>
+            <a:endParaRPr lang="en-US" sz="2000" dirty="0"/>
+          </a:p>
+        </p:txBody>
+      </p:sp>
+      <p:sp>
+        <p:nvSpPr>
+          <p:cNvPr id="9" name="Text 7"/>
+          <p:cNvSpPr/>
+          <p:nvPr/>
+        </p:nvSpPr>
+        <p:spPr>
+          <a:xfrm>
+            <a:off x="1188720" y="1307592"/>
+            <a:ext cx="7132320" cy="411480"/>
+          </a:xfrm>
+          <a:prstGeom prst="rect">
+            <a:avLst/>
+          </a:prstGeom>
+          <a:noFill/>
+          <a:ln/>
+        </p:spPr>
+        <p:txBody>
+          <a:bodyPr wrap="square" rtlCol="0" anchor="ctr"/>
+          <a:lstStyle/>
+          <a:p>
+            <a:pPr indent="0" marL="0">
+              <a:buNone/>
+            </a:pPr>
+            <a:r>
+              <a:rPr lang="en-US" sz="1400" b="1" dirty="0">
+                <a:solidFill>
+                  <a:srgbClr val="1B2A4A"/>
+                </a:solidFill>
+                <a:latin typeface="Calibri" pitchFamily="34" charset="0"/>
+                <a:ea typeface="Calibri" pitchFamily="34" charset="-122"/>
+                <a:cs typeface="Calibri" pitchFamily="34" charset="-120"/>
+              </a:rPr>
+              <a:t>What is Friction?</a:t>
+            </a:r>
+            <a:endParaRPr lang="en-US" sz="1400" dirty="0"/>
+          </a:p>
+        </p:txBody>
+      </p:sp>
+      <p:sp>
+        <p:nvSpPr>
+          <p:cNvPr id="10" name="Text 8"/>
+          <p:cNvSpPr/>
+          <p:nvPr/>
+        </p:nvSpPr>
+        <p:spPr>
+          <a:xfrm>
+            <a:off x="1188720" y="1691640"/>
+            <a:ext cx="7132320" cy="320040"/>
+          </a:xfrm>
+          <a:prstGeom prst="rect">
+            <a:avLst/>
+          </a:prstGeom>
+          <a:noFill/>
+          <a:ln/>
+        </p:spPr>
+        <p:txBody>
+          <a:bodyPr wrap="square" rtlCol="0" anchor="ctr"/>
+          <a:lstStyle/>
+          <a:p>
+            <a:pPr indent="0" marL="0">
+              <a:buNone/>
+            </a:pPr>
+            <a:r>
+              <a:rPr lang="en-US" sz="1100" dirty="0">
+                <a:solidFill>
+                  <a:srgbClr val="6B6660"/>
+                </a:solidFill>
+                <a:latin typeface="Calibri" pitchFamily="34" charset="0"/>
+                <a:ea typeface="Calibri" pitchFamily="34" charset="-122"/>
+                <a:cs typeface="Calibri" pitchFamily="34" charset="-120"/>
+              </a:rPr>
+              <a:t>It's AumSum Time  •  6 min</a:t>
+            </a:r>
+            <a:endParaRPr lang="en-US" sz="1100" dirty="0"/>
+          </a:p>
+        </p:txBody>
+      </p:sp>
+      <p:sp>
+        <p:nvSpPr>
+          <p:cNvPr id="11" name="Shape 9"/>
+          <p:cNvSpPr/>
+          <p:nvPr/>
+        </p:nvSpPr>
+        <p:spPr>
+          <a:xfrm>
+            <a:off x="457200" y="2423160"/>
+            <a:ext cx="8229600" cy="1051560"/>
+          </a:xfrm>
+          <a:prstGeom prst="rect">
+            <a:avLst/>
+          </a:prstGeom>
+          <a:solidFill>
+            <a:srgbClr val="FFFFFF"/>
+          </a:solidFill>
+          <a:ln/>
+          <a:effectLst>
+            <a:outerShdw sx="100000" sy="100000" kx="0" ky="0" algn="bl" rotWithShape="0" blurRad="76200" dist="25400" dir="8100000">
+              <a:srgbClr val="000000">
+                <a:alpha val="12000"/>
+              </a:srgbClr>
+            </a:outerShdw>
+          </a:effectLst>
+        </p:spPr>
+      </p:sp>
+      <p:sp>
+        <p:nvSpPr>
+          <p:cNvPr id="12" name="Shape 10"/>
+          <p:cNvSpPr/>
+          <p:nvPr/>
+        </p:nvSpPr>
+        <p:spPr>
+          <a:xfrm>
+            <a:off x="457200" y="2423160"/>
+            <a:ext cx="64008" cy="1051560"/>
+          </a:xfrm>
+          <a:prstGeom prst="rect">
+            <a:avLst/>
+          </a:prstGeom>
+          <a:solidFill>
+            <a:srgbClr val="C8372D"/>
+          </a:solidFill>
+          <a:ln/>
+        </p:spPr>
+      </p:sp>
+      <p:sp>
+        <p:nvSpPr>
+          <p:cNvPr id="13" name="Text 11"/>
+          <p:cNvSpPr/>
+          <p:nvPr/>
+        </p:nvSpPr>
+        <p:spPr>
+          <a:xfrm>
+            <a:off x="640080" y="2514600"/>
+            <a:ext cx="457200" cy="457200"/>
+          </a:xfrm>
+          <a:prstGeom prst="rect">
+            <a:avLst/>
+          </a:prstGeom>
+          <a:noFill/>
+          <a:ln/>
+        </p:spPr>
+        <p:txBody>
+          <a:bodyPr wrap="square" rtlCol="0" anchor="ctr"/>
+          <a:lstStyle/>
+          <a:p>
+            <a:pPr algn="ctr" indent="0" marL="0">
+              <a:buNone/>
+            </a:pPr>
+            <a:r>
+              <a:rPr lang="en-US" sz="2000" dirty="0">
+                <a:solidFill>
+                  <a:srgbClr val="C8372D"/>
+                </a:solidFill>
+                <a:latin typeface="Calibri" pitchFamily="34" charset="0"/>
+                <a:ea typeface="Calibri" pitchFamily="34" charset="-122"/>
+                <a:cs typeface="Calibri" pitchFamily="34" charset="-120"/>
+              </a:rPr>
+              <a:t>▶</a:t>
+            </a:r>
+            <a:endParaRPr lang="en-US" sz="2000" dirty="0"/>
+          </a:p>
+        </p:txBody>
+      </p:sp>
+      <p:sp>
+        <p:nvSpPr>
+          <p:cNvPr id="14" name="Text 12"/>
+          <p:cNvSpPr/>
+          <p:nvPr/>
+        </p:nvSpPr>
+        <p:spPr>
+          <a:xfrm>
+            <a:off x="1188720" y="2496312"/>
+            <a:ext cx="7132320" cy="411480"/>
+          </a:xfrm>
+          <a:prstGeom prst="rect">
+            <a:avLst/>
+          </a:prstGeom>
+          <a:noFill/>
+          <a:ln/>
+        </p:spPr>
+        <p:txBody>
+          <a:bodyPr wrap="square" rtlCol="0" anchor="ctr"/>
+          <a:lstStyle/>
+          <a:p>
+            <a:pPr indent="0" marL="0">
+              <a:buNone/>
+            </a:pPr>
+            <a:r>
+              <a:rPr lang="en-US" sz="1400" b="1" dirty="0">
+                <a:solidFill>
+                  <a:srgbClr val="1B2A4A"/>
+                </a:solidFill>
+                <a:latin typeface="Calibri" pitchFamily="34" charset="0"/>
+                <a:ea typeface="Calibri" pitchFamily="34" charset="-122"/>
+                <a:cs typeface="Calibri" pitchFamily="34" charset="-120"/>
+              </a:rPr>
+              <a:t>Air Resistance and Terminal Velocity</a:t>
+            </a:r>
+            <a:endParaRPr lang="en-US" sz="1400" dirty="0"/>
+          </a:p>
+        </p:txBody>
+      </p:sp>
+      <p:sp>
+        <p:nvSpPr>
+          <p:cNvPr id="15" name="Text 13"/>
+          <p:cNvSpPr/>
+          <p:nvPr/>
+        </p:nvSpPr>
+        <p:spPr>
+          <a:xfrm>
+            <a:off x="1188720" y="2880360"/>
+            <a:ext cx="7132320" cy="320040"/>
+          </a:xfrm>
+          <a:prstGeom prst="rect">
+            <a:avLst/>
+          </a:prstGeom>
+          <a:noFill/>
+          <a:ln/>
+        </p:spPr>
+        <p:txBody>
+          <a:bodyPr wrap="square" rtlCol="0" anchor="ctr"/>
+          <a:lstStyle/>
+          <a:p>
+            <a:pPr indent="0" marL="0">
+              <a:buNone/>
+            </a:pPr>
+            <a:r>
+              <a:rPr lang="en-US" sz="1100" dirty="0">
+                <a:solidFill>
+                  <a:srgbClr val="6B6660"/>
+                </a:solidFill>
+                <a:latin typeface="Calibri" pitchFamily="34" charset="0"/>
+                <a:ea typeface="Calibri" pitchFamily="34" charset="-122"/>
+                <a:cs typeface="Calibri" pitchFamily="34" charset="-120"/>
+              </a:rPr>
+              <a:t>Cognito  •  5 min</a:t>
+            </a:r>
+            <a:endParaRPr lang="en-US" sz="1100" dirty="0"/>
+          </a:p>
+        </p:txBody>
+      </p:sp>
+      <p:sp>
+        <p:nvSpPr>
+          <p:cNvPr id="16" name="Shape 14"/>
+          <p:cNvSpPr/>
+          <p:nvPr/>
+        </p:nvSpPr>
+        <p:spPr>
+          <a:xfrm>
+            <a:off x="457200" y="3611880"/>
+            <a:ext cx="8229600" cy="1051560"/>
+          </a:xfrm>
+          <a:prstGeom prst="rect">
+            <a:avLst/>
+          </a:prstGeom>
+          <a:solidFill>
+            <a:srgbClr val="FFFFFF"/>
+          </a:solidFill>
+          <a:ln/>
+          <a:effectLst>
+            <a:outerShdw sx="100000" sy="100000" kx="0" ky="0" algn="bl" rotWithShape="0" blurRad="76200" dist="25400" dir="8100000">
+              <a:srgbClr val="000000">
+                <a:alpha val="12000"/>
+              </a:srgbClr>
+            </a:outerShdw>
+          </a:effectLst>
+        </p:spPr>
+      </p:sp>
+      <p:sp>
+        <p:nvSpPr>
+          <p:cNvPr id="17" name="Shape 15"/>
+          <p:cNvSpPr/>
+          <p:nvPr/>
+        </p:nvSpPr>
+        <p:spPr>
+          <a:xfrm>
+            <a:off x="457200" y="3611880"/>
+            <a:ext cx="64008" cy="1051560"/>
+          </a:xfrm>
+          <a:prstGeom prst="rect">
+            <a:avLst/>
+          </a:prstGeom>
+          <a:solidFill>
+            <a:srgbClr val="C8372D"/>
+          </a:solidFill>
+          <a:ln/>
+        </p:spPr>
+      </p:sp>
+      <p:sp>
+        <p:nvSpPr>
+          <p:cNvPr id="18" name="Text 16"/>
+          <p:cNvSpPr/>
+          <p:nvPr/>
+        </p:nvSpPr>
+        <p:spPr>
+          <a:xfrm>
+            <a:off x="640080" y="3703320"/>
+            <a:ext cx="457200" cy="457200"/>
+          </a:xfrm>
+          <a:prstGeom prst="rect">
+            <a:avLst/>
+          </a:prstGeom>
+          <a:noFill/>
+          <a:ln/>
+        </p:spPr>
+        <p:txBody>
+          <a:bodyPr wrap="square" rtlCol="0" anchor="ctr"/>
+          <a:lstStyle/>
+          <a:p>
+            <a:pPr algn="ctr" indent="0" marL="0">
+              <a:buNone/>
+            </a:pPr>
+            <a:r>
+              <a:rPr lang="en-US" sz="2000" dirty="0">
+                <a:solidFill>
+                  <a:srgbClr val="C8372D"/>
+                </a:solidFill>
+                <a:latin typeface="Calibri" pitchFamily="34" charset="0"/>
+                <a:ea typeface="Calibri" pitchFamily="34" charset="-122"/>
+                <a:cs typeface="Calibri" pitchFamily="34" charset="-120"/>
+              </a:rPr>
+              <a:t>▶</a:t>
+            </a:r>
+            <a:endParaRPr lang="en-US" sz="2000" dirty="0"/>
+          </a:p>
+        </p:txBody>
+      </p:sp>
+      <p:sp>
+        <p:nvSpPr>
+          <p:cNvPr id="19" name="Text 17"/>
+          <p:cNvSpPr/>
+          <p:nvPr/>
+        </p:nvSpPr>
+        <p:spPr>
+          <a:xfrm>
+            <a:off x="1188720" y="3685032"/>
+            <a:ext cx="7132320" cy="411480"/>
+          </a:xfrm>
+          <a:prstGeom prst="rect">
+            <a:avLst/>
+          </a:prstGeom>
+          <a:noFill/>
+          <a:ln/>
+        </p:spPr>
+        <p:txBody>
+          <a:bodyPr wrap="square" rtlCol="0" anchor="ctr"/>
+          <a:lstStyle/>
+          <a:p>
+            <a:pPr indent="0" marL="0">
+              <a:buNone/>
+            </a:pPr>
+            <a:r>
+              <a:rPr lang="en-US" sz="1400" b="1" dirty="0">
+                <a:solidFill>
+                  <a:srgbClr val="1B2A4A"/>
+                </a:solidFill>
+                <a:latin typeface="Calibri" pitchFamily="34" charset="0"/>
+                <a:ea typeface="Calibri" pitchFamily="34" charset="-122"/>
+                <a:cs typeface="Calibri" pitchFamily="34" charset="-120"/>
+              </a:rPr>
+              <a:t>Friction — Useful and Harmful</a:t>
+            </a:r>
+            <a:endParaRPr lang="en-US" sz="1400" dirty="0"/>
+          </a:p>
+        </p:txBody>
+      </p:sp>
+      <p:sp>
+        <p:nvSpPr>
+          <p:cNvPr id="20" name="Text 18"/>
+          <p:cNvSpPr/>
+          <p:nvPr/>
+        </p:nvSpPr>
+        <p:spPr>
+          <a:xfrm>
+            <a:off x="1188720" y="4069080"/>
+            <a:ext cx="7132320" cy="320040"/>
+          </a:xfrm>
+          <a:prstGeom prst="rect">
+            <a:avLst/>
+          </a:prstGeom>
+          <a:noFill/>
+          <a:ln/>
+        </p:spPr>
+        <p:txBody>
+          <a:bodyPr wrap="square" rtlCol="0" anchor="ctr"/>
+          <a:lstStyle/>
+          <a:p>
+            <a:pPr indent="0" marL="0">
+              <a:buNone/>
+            </a:pPr>
+            <a:r>
+              <a:rPr lang="en-US" sz="1100" dirty="0">
+                <a:solidFill>
+                  <a:srgbClr val="6B6660"/>
+                </a:solidFill>
+                <a:latin typeface="Calibri" pitchFamily="34" charset="0"/>
+                <a:ea typeface="Calibri" pitchFamily="34" charset="-122"/>
+                <a:cs typeface="Calibri" pitchFamily="34" charset="-120"/>
+              </a:rPr>
+              <a:t>FuseSchool  •  4 min</a:t>
+            </a:r>
+            <a:endParaRPr lang="en-US" sz="1100" dirty="0"/>
+          </a:p>
+        </p:txBody>
+      </p:sp>
+    </p:spTree>
+  </p:cSld>
+  <p:clrMapOvr>
+    <a:masterClrMapping/>
+  </p:clrMapOvr>
+</p:sld>
+</file>
+
+<file path=ppt/slides/slide8.xml><?xml version="1.0" encoding="utf-8"?>
+<p:sld xmlns:a="http://schemas.openxmlformats.org/drawingml/2006/main" xmlns:r="http://schemas.openxmlformats.org/officeDocument/2006/relationships" xmlns:p="http://schemas.openxmlformats.org/presentationml/2006/main">
+  <p:cSld name="Slide 8">
+    <p:spTree>
+      <p:nvGrpSpPr>
+        <p:cNvPr id="1" name=""/>
+        <p:cNvGrpSpPr/>
+        <p:nvPr/>
+      </p:nvGrpSpPr>
+      <p:grpSpPr>
+        <a:xfrm>
+          <a:off x="0" y="0"/>
+          <a:ext cx="0" cy="0"/>
+          <a:chOff x="0" y="0"/>
+          <a:chExt cx="0" cy="0"/>
+        </a:xfrm>
+      </p:grpSpPr>
+      <p:sp>
+        <p:nvSpPr>
+          <p:cNvPr id="2" name="Shape 0"/>
+          <p:cNvSpPr/>
+          <p:nvPr/>
+        </p:nvSpPr>
+        <p:spPr>
+          <a:xfrm>
+            <a:off x="0" y="0"/>
+            <a:ext cx="9144000" cy="5143500"/>
+          </a:xfrm>
+          <a:prstGeom prst="rect">
+            <a:avLst/>
+          </a:prstGeom>
+          <a:solidFill>
+            <a:srgbClr val="1B2A4A"/>
+          </a:solidFill>
+          <a:ln/>
+        </p:spPr>
+      </p:sp>
+      <p:sp>
+        <p:nvSpPr>
+          <p:cNvPr id="3" name="Shape 1"/>
+          <p:cNvSpPr/>
+          <p:nvPr/>
+        </p:nvSpPr>
+        <p:spPr>
+          <a:xfrm>
+            <a:off x="0" y="4777740"/>
+            <a:ext cx="9144000" cy="365760"/>
+          </a:xfrm>
+          <a:prstGeom prst="rect">
+            <a:avLst/>
+          </a:prstGeom>
+          <a:solidFill>
+            <a:srgbClr val="C8372D"/>
+          </a:solidFill>
+          <a:ln/>
+        </p:spPr>
+      </p:sp>
+      <p:sp>
+        <p:nvSpPr>
+          <p:cNvPr id="4" name="Text 2"/>
+          <p:cNvSpPr/>
+          <p:nvPr/>
+        </p:nvSpPr>
+        <p:spPr>
+          <a:xfrm>
+            <a:off x="731520" y="1371600"/>
+            <a:ext cx="7680960" cy="914400"/>
+          </a:xfrm>
+          <a:prstGeom prst="rect">
+            <a:avLst/>
+          </a:prstGeom>
+          <a:noFill/>
+          <a:ln/>
+        </p:spPr>
+        <p:txBody>
+          <a:bodyPr wrap="square" rtlCol="0" anchor="ctr"/>
+          <a:lstStyle/>
+          <a:p>
+            <a:pPr algn="ctr" indent="0" marL="0">
+              <a:buNone/>
+            </a:pPr>
+            <a:r>
+              <a:rPr lang="en-US" sz="3600" b="1" dirty="0">
+                <a:solidFill>
+                  <a:srgbClr val="FFFFFF"/>
+                </a:solidFill>
+                <a:latin typeface="Georgia" pitchFamily="34" charset="0"/>
+                <a:ea typeface="Georgia" pitchFamily="34" charset="-122"/>
+                <a:cs typeface="Georgia" pitchFamily="34" charset="-120"/>
+              </a:rPr>
+              <a:t>Review &amp; Practise</a:t>
+            </a:r>
+            <a:endParaRPr lang="en-US" sz="3600" dirty="0"/>
+          </a:p>
+        </p:txBody>
+      </p:sp>
+      <p:sp>
+        <p:nvSpPr>
+          <p:cNvPr id="5" name="Text 3"/>
+          <p:cNvSpPr/>
+          <p:nvPr/>
+        </p:nvSpPr>
+        <p:spPr>
+          <a:xfrm>
+            <a:off x="731520" y="2560320"/>
+            <a:ext cx="7680960" cy="548640"/>
+          </a:xfrm>
+          <a:prstGeom prst="rect">
+            <a:avLst/>
+          </a:prstGeom>
+          <a:noFill/>
+          <a:ln/>
+        </p:spPr>
+        <p:txBody>
+          <a:bodyPr wrap="square" rtlCol="0" anchor="ctr"/>
+          <a:lstStyle/>
+          <a:p>
+            <a:pPr algn="ctr" indent="0" marL="0">
+              <a:buNone/>
+            </a:pPr>
+            <a:r>
+              <a:rPr lang="en-US" sz="2000" dirty="0">
+                <a:solidFill>
+                  <a:srgbClr val="C8372D"/>
+                </a:solidFill>
+                <a:latin typeface="Calibri" pitchFamily="34" charset="0"/>
+                <a:ea typeface="Calibri" pitchFamily="34" charset="-122"/>
+                <a:cs typeface="Calibri" pitchFamily="34" charset="-120"/>
+              </a:rPr>
               <a:t>mrzocchi.com</a:t>
             </a:r>
-            <a:endParaRPr lang="en-US" sz="1400" dirty="0"/>
+            <a:endParaRPr lang="en-US" sz="2000" dirty="0"/>
           </a:p>
         </p:txBody>
       </p:sp>
